--- a/Mapped Curriculum Lessons/Grade 6/Lesson 09 - Condition Loops/Condition Loops - Slides.pptx
+++ b/Mapped Curriculum Lessons/Grade 6/Lesson 09 - Condition Loops/Condition Loops - Slides.pptx
@@ -2,28 +2,28 @@
 <file path=ppt/presentation.xml><?xml version="1.0" encoding="utf-8"?>
 <p:presentation xmlns:p="http://schemas.openxmlformats.org/presentationml/2006/main" embedTrueTypeFonts="1" saveSubsetFonts="0">
   <p:sldMasterIdLst>
-    <p:sldMasterId xmlns:r="http://schemas.openxmlformats.org/officeDocument/2006/relationships" id="2147483648" r:id="Rdb3210e9cba84c33"/>
+    <p:sldMasterId xmlns:r="http://schemas.openxmlformats.org/officeDocument/2006/relationships" id="2147483648" r:id="R7cb0252770334e39"/>
   </p:sldMasterIdLst>
   <p:notesMasterIdLst>
-    <p:notesMasterId xmlns:r="http://schemas.openxmlformats.org/officeDocument/2006/relationships" r:id="R47dc29a5796b4409"/>
+    <p:notesMasterId xmlns:r="http://schemas.openxmlformats.org/officeDocument/2006/relationships" r:id="Rac06a949a8fb42ac"/>
   </p:notesMasterIdLst>
   <p:sldIdLst>
-    <p:sldId xmlns:r="http://schemas.openxmlformats.org/officeDocument/2006/relationships" id="256" r:id="R08e28fd6c41d4055"/>
-    <p:sldId xmlns:r="http://schemas.openxmlformats.org/officeDocument/2006/relationships" id="257" r:id="Rade3f6229787421d"/>
-    <p:sldId xmlns:r="http://schemas.openxmlformats.org/officeDocument/2006/relationships" id="258" r:id="Re9bd7d8b2356469a"/>
-    <p:sldId xmlns:r="http://schemas.openxmlformats.org/officeDocument/2006/relationships" id="259" r:id="R6f98e8d0f5134ba0"/>
-    <p:sldId xmlns:r="http://schemas.openxmlformats.org/officeDocument/2006/relationships" id="260" r:id="R1ae4270777194b9b"/>
-    <p:sldId xmlns:r="http://schemas.openxmlformats.org/officeDocument/2006/relationships" id="261" r:id="R6674dd8375e34e52"/>
-    <p:sldId xmlns:r="http://schemas.openxmlformats.org/officeDocument/2006/relationships" id="262" r:id="R1654aa8c519f49eb"/>
-    <p:sldId xmlns:r="http://schemas.openxmlformats.org/officeDocument/2006/relationships" id="263" r:id="R7fb2257f480049f3"/>
-    <p:sldId xmlns:r="http://schemas.openxmlformats.org/officeDocument/2006/relationships" id="264" r:id="Rc3c7d510753643e0"/>
+    <p:sldId xmlns:r="http://schemas.openxmlformats.org/officeDocument/2006/relationships" id="256" r:id="R461bfca9b8824614"/>
+    <p:sldId xmlns:r="http://schemas.openxmlformats.org/officeDocument/2006/relationships" id="257" r:id="Rd603734444bb45e3"/>
+    <p:sldId xmlns:r="http://schemas.openxmlformats.org/officeDocument/2006/relationships" id="258" r:id="Rf1976f0104c2441f"/>
+    <p:sldId xmlns:r="http://schemas.openxmlformats.org/officeDocument/2006/relationships" id="259" r:id="R6a4648f8150b4a0f"/>
+    <p:sldId xmlns:r="http://schemas.openxmlformats.org/officeDocument/2006/relationships" id="260" r:id="R8be46c39f4d34a31"/>
+    <p:sldId xmlns:r="http://schemas.openxmlformats.org/officeDocument/2006/relationships" id="261" r:id="R731f4fe7129949fa"/>
+    <p:sldId xmlns:r="http://schemas.openxmlformats.org/officeDocument/2006/relationships" id="262" r:id="Rae30b0528bd34cfb"/>
+    <p:sldId xmlns:r="http://schemas.openxmlformats.org/officeDocument/2006/relationships" id="263" r:id="Re914731971934bfc"/>
+    <p:sldId xmlns:r="http://schemas.openxmlformats.org/officeDocument/2006/relationships" id="264" r:id="R5b4858318b674506"/>
   </p:sldIdLst>
   <p:sldSz cx="12192000" cy="6858000"/>
   <p:notesSz cx="6858000" cy="9144000"/>
   <p:embeddedFontLst>
     <p:embeddedFont>
       <p:font typeface="JetBrains Mono"/>
-      <p:regular xmlns:r="http://schemas.openxmlformats.org/officeDocument/2006/relationships" r:id="Rc3013af8db744f46"/>
+      <p:regular xmlns:r="http://schemas.openxmlformats.org/officeDocument/2006/relationships" r:id="Rcb8c198411954a4e"/>
     </p:embeddedFont>
   </p:embeddedFontLst>
 </p:presentation>
@@ -1071,7 +1071,7 @@
           <p:nvPr/>
         </p:nvPicPr>
         <p:blipFill rotWithShape="1">
-          <a:blip xmlns:r="http://schemas.openxmlformats.org/officeDocument/2006/relationships" xmlns:a="http://schemas.openxmlformats.org/drawingml/2006/main" r:embed="Rec355e16770845f8"/>
+          <a:blip xmlns:r="http://schemas.openxmlformats.org/officeDocument/2006/relationships" xmlns:a="http://schemas.openxmlformats.org/drawingml/2006/main" r:embed="R506611feb8e54706"/>
           <a:stretch xmlns:a="http://schemas.openxmlformats.org/drawingml/2006/main"/>
         </p:blipFill>
         <p:spPr>
@@ -1451,7 +1451,7 @@
           <p:nvPr/>
         </p:nvPicPr>
         <p:blipFill rotWithShape="1">
-          <a:blip xmlns:r="http://schemas.openxmlformats.org/officeDocument/2006/relationships" xmlns:a="http://schemas.openxmlformats.org/drawingml/2006/main" r:embed="R4cb4617fdc9e40fa">
+          <a:blip xmlns:r="http://schemas.openxmlformats.org/officeDocument/2006/relationships" xmlns:a="http://schemas.openxmlformats.org/drawingml/2006/main" r:embed="R4c2c98287e074659">
             <a:alphaModFix amt="28000"/>
           </a:blip>
           <a:stretch xmlns:a="http://schemas.openxmlformats.org/drawingml/2006/main"/>
@@ -1664,7 +1664,7 @@
           <p:nvPr/>
         </p:nvPicPr>
         <p:blipFill rotWithShape="1">
-          <a:blip xmlns:r="http://schemas.openxmlformats.org/officeDocument/2006/relationships" xmlns:a="http://schemas.openxmlformats.org/drawingml/2006/main" r:embed="R4a6d62c9de1d43f7">
+          <a:blip xmlns:r="http://schemas.openxmlformats.org/officeDocument/2006/relationships" xmlns:a="http://schemas.openxmlformats.org/drawingml/2006/main" r:embed="Rf54e7e23ab0545ca">
             <a:alphaModFix amt="28000"/>
           </a:blip>
           <a:stretch xmlns:a="http://schemas.openxmlformats.org/drawingml/2006/main"/>
@@ -1899,7 +1899,7 @@
           <p:nvPr/>
         </p:nvPicPr>
         <p:blipFill rotWithShape="1">
-          <a:blip xmlns:r="http://schemas.openxmlformats.org/officeDocument/2006/relationships" xmlns:a="http://schemas.openxmlformats.org/drawingml/2006/main" r:embed="Rd2a9465326794c46">
+          <a:blip xmlns:r="http://schemas.openxmlformats.org/officeDocument/2006/relationships" xmlns:a="http://schemas.openxmlformats.org/drawingml/2006/main" r:embed="R708c431301d844ff">
             <a:alphaModFix amt="28000"/>
           </a:blip>
           <a:stretch xmlns:a="http://schemas.openxmlformats.org/drawingml/2006/main"/>
@@ -2176,7 +2176,7 @@
           <p:nvPr/>
         </p:nvPicPr>
         <p:blipFill rotWithShape="1">
-          <a:blip xmlns:r="http://schemas.openxmlformats.org/officeDocument/2006/relationships" xmlns:a="http://schemas.openxmlformats.org/drawingml/2006/main" r:embed="Rb07bd616ae1344d9">
+          <a:blip xmlns:r="http://schemas.openxmlformats.org/officeDocument/2006/relationships" xmlns:a="http://schemas.openxmlformats.org/drawingml/2006/main" r:embed="R85b3b62004c642ad">
             <a:alphaModFix amt="28000"/>
           </a:blip>
           <a:stretch xmlns:a="http://schemas.openxmlformats.org/drawingml/2006/main"/>
@@ -2451,7 +2451,7 @@
           <p:nvPr/>
         </p:nvPicPr>
         <p:blipFill rotWithShape="1">
-          <a:blip xmlns:r="http://schemas.openxmlformats.org/officeDocument/2006/relationships" xmlns:a="http://schemas.openxmlformats.org/drawingml/2006/main" r:embed="R9810ad6ae5014c86">
+          <a:blip xmlns:r="http://schemas.openxmlformats.org/officeDocument/2006/relationships" xmlns:a="http://schemas.openxmlformats.org/drawingml/2006/main" r:embed="R3ffcbca0246040d6">
             <a:alphaModFix amt="28000"/>
           </a:blip>
           <a:stretch xmlns:a="http://schemas.openxmlformats.org/drawingml/2006/main"/>
@@ -2875,7 +2875,7 @@
           <p:nvPr/>
         </p:nvPicPr>
         <p:blipFill rotWithShape="1">
-          <a:blip xmlns:r="http://schemas.openxmlformats.org/officeDocument/2006/relationships" xmlns:a="http://schemas.openxmlformats.org/drawingml/2006/main" r:embed="R314001cadd5f4f80">
+          <a:blip xmlns:r="http://schemas.openxmlformats.org/officeDocument/2006/relationships" xmlns:a="http://schemas.openxmlformats.org/drawingml/2006/main" r:embed="R82a7ec0d76ca4b0b">
             <a:alphaModFix amt="28000"/>
           </a:blip>
           <a:stretch xmlns:a="http://schemas.openxmlformats.org/drawingml/2006/main"/>
@@ -3016,7 +3016,7 @@
           <p:nvPr/>
         </p:nvPicPr>
         <p:blipFill rotWithShape="1">
-          <a:blip xmlns:r="http://schemas.openxmlformats.org/officeDocument/2006/relationships" xmlns:a="http://schemas.openxmlformats.org/drawingml/2006/main" r:embed="Rd08159bac69b41e7">
+          <a:blip xmlns:r="http://schemas.openxmlformats.org/officeDocument/2006/relationships" xmlns:a="http://schemas.openxmlformats.org/drawingml/2006/main" r:embed="R17ea85aed3c54bd4">
             <a:alphaModFix amt="28000"/>
           </a:blip>
           <a:stretch xmlns:a="http://schemas.openxmlformats.org/drawingml/2006/main"/>
@@ -3130,7 +3130,7 @@
           <p:nvPr/>
         </p:nvPicPr>
         <p:blipFill rotWithShape="1">
-          <a:blip xmlns:r="http://schemas.openxmlformats.org/officeDocument/2006/relationships" xmlns:a="http://schemas.openxmlformats.org/drawingml/2006/main" r:embed="R1ca6365c7df94480">
+          <a:blip xmlns:r="http://schemas.openxmlformats.org/officeDocument/2006/relationships" xmlns:a="http://schemas.openxmlformats.org/drawingml/2006/main" r:embed="R0a56222a51414015">
             <a:alphaModFix amt="28000"/>
           </a:blip>
           <a:stretch xmlns:a="http://schemas.openxmlformats.org/drawingml/2006/main"/>
@@ -3457,7 +3457,7 @@
           <p:nvPr/>
         </p:nvPicPr>
         <p:blipFill rotWithShape="1">
-          <a:blip xmlns:r="http://schemas.openxmlformats.org/officeDocument/2006/relationships" xmlns:a="http://schemas.openxmlformats.org/drawingml/2006/main" r:embed="R7ecbc03b3e614be1">
+          <a:blip xmlns:r="http://schemas.openxmlformats.org/officeDocument/2006/relationships" xmlns:a="http://schemas.openxmlformats.org/drawingml/2006/main" r:embed="R784480e9bf70440c">
             <a:alphaModFix amt="28000"/>
           </a:blip>
           <a:stretch xmlns:a="http://schemas.openxmlformats.org/drawingml/2006/main"/>
@@ -3745,7 +3745,7 @@
           <p:nvPr/>
         </p:nvPicPr>
         <p:blipFill rotWithShape="1">
-          <a:blip xmlns:r="http://schemas.openxmlformats.org/officeDocument/2006/relationships" xmlns:a="http://schemas.openxmlformats.org/drawingml/2006/main" r:embed="Rae03e5c2c10747ca">
+          <a:blip xmlns:r="http://schemas.openxmlformats.org/officeDocument/2006/relationships" xmlns:a="http://schemas.openxmlformats.org/drawingml/2006/main" r:embed="R55a445607a3c4c25">
             <a:alphaModFix amt="28000"/>
           </a:blip>
           <a:stretch xmlns:a="http://schemas.openxmlformats.org/drawingml/2006/main"/>
@@ -3982,17 +3982,17 @@
   </p:cSld>
   <p:clrMap bg1="lt1" tx1="dk1" bg2="lt2" tx2="dk2" accent1="accent1" accent2="accent2" accent3="accent3" accent4="accent4" accent5="accent5" accent6="accent6" hlink="hlink" folHlink="folHlink"/>
   <p:sldLayoutIdLst>
-    <p:sldLayoutId xmlns:r="http://schemas.openxmlformats.org/officeDocument/2006/relationships" id="2147483649" r:id="Re40f5293bd1b4a0c"/>
-    <p:sldLayoutId xmlns:r="http://schemas.openxmlformats.org/officeDocument/2006/relationships" id="2147483650" r:id="Rd8af89a419804a58"/>
-    <p:sldLayoutId xmlns:r="http://schemas.openxmlformats.org/officeDocument/2006/relationships" id="2147483651" r:id="Rd4ad58b35ade4720"/>
-    <p:sldLayoutId xmlns:r="http://schemas.openxmlformats.org/officeDocument/2006/relationships" id="2147483652" r:id="R876b7ac6f56a44d9"/>
-    <p:sldLayoutId xmlns:r="http://schemas.openxmlformats.org/officeDocument/2006/relationships" id="2147483653" r:id="R4dd155605e7f42ca"/>
-    <p:sldLayoutId xmlns:r="http://schemas.openxmlformats.org/officeDocument/2006/relationships" id="2147483654" r:id="R1b8cb9ed97dc402f"/>
-    <p:sldLayoutId xmlns:r="http://schemas.openxmlformats.org/officeDocument/2006/relationships" id="2147483655" r:id="R415f9f44335a405d"/>
-    <p:sldLayoutId xmlns:r="http://schemas.openxmlformats.org/officeDocument/2006/relationships" id="2147483656" r:id="R11840e30506c4d34"/>
-    <p:sldLayoutId xmlns:r="http://schemas.openxmlformats.org/officeDocument/2006/relationships" id="2147483657" r:id="R6403b8c12af54d62"/>
-    <p:sldLayoutId xmlns:r="http://schemas.openxmlformats.org/officeDocument/2006/relationships" id="2147483658" r:id="R0094bfaa74154d5e"/>
-    <p:sldLayoutId xmlns:r="http://schemas.openxmlformats.org/officeDocument/2006/relationships" id="2147483659" r:id="Reb9c87e9a69a474c"/>
+    <p:sldLayoutId xmlns:r="http://schemas.openxmlformats.org/officeDocument/2006/relationships" id="2147483649" r:id="R00549220412a4e8d"/>
+    <p:sldLayoutId xmlns:r="http://schemas.openxmlformats.org/officeDocument/2006/relationships" id="2147483650" r:id="Reb48cb218d8141fd"/>
+    <p:sldLayoutId xmlns:r="http://schemas.openxmlformats.org/officeDocument/2006/relationships" id="2147483651" r:id="R5c7f08b991fd41a3"/>
+    <p:sldLayoutId xmlns:r="http://schemas.openxmlformats.org/officeDocument/2006/relationships" id="2147483652" r:id="Rdc167078eabd404a"/>
+    <p:sldLayoutId xmlns:r="http://schemas.openxmlformats.org/officeDocument/2006/relationships" id="2147483653" r:id="Rf0bd14df6596426a"/>
+    <p:sldLayoutId xmlns:r="http://schemas.openxmlformats.org/officeDocument/2006/relationships" id="2147483654" r:id="R45df11e2cfc14656"/>
+    <p:sldLayoutId xmlns:r="http://schemas.openxmlformats.org/officeDocument/2006/relationships" id="2147483655" r:id="Rf268e133bbc74801"/>
+    <p:sldLayoutId xmlns:r="http://schemas.openxmlformats.org/officeDocument/2006/relationships" id="2147483656" r:id="R68916bc8a0c54f4f"/>
+    <p:sldLayoutId xmlns:r="http://schemas.openxmlformats.org/officeDocument/2006/relationships" id="2147483657" r:id="Rcde709861c834177"/>
+    <p:sldLayoutId xmlns:r="http://schemas.openxmlformats.org/officeDocument/2006/relationships" id="2147483658" r:id="Re82104030ed14416"/>
+    <p:sldLayoutId xmlns:r="http://schemas.openxmlformats.org/officeDocument/2006/relationships" id="2147483659" r:id="R34c5e8520fb948a8"/>
   </p:sldLayoutIdLst>
   <p:hf hdr="0" ftr="0" dt="0"/>
   <p:txStyles>
@@ -7407,18 +7407,7 @@
                 <a:ea typeface="Calibri"/>
                 <a:cs typeface="Calibri"/>
               </a:rPr>
-              <a:t>Change the program so the user has two attempts. Test one run by guessing 7 first and another with two wrong guesses. The program should display 1 try and 2 </a:t>
-            </a:r>
-            <a:r>
-              <a:rPr sz="2400" b="0">
-                <a:solidFill>
-                  <a:srgbClr val="067D17"/>
-                </a:solidFill>
-                <a:latin typeface="JetBrains Mono"/>
-                <a:ea typeface="JetBrains Mono"/>
-                <a:cs typeface="JetBrains Mono"/>
-              </a:rPr>
-              <a:t>"tries."</a:t>
+              <a:t>Change the program so the user has two attempts. Test one run by guessing 7 first and another with two wrong guesses. The program should display 1 try and 2 tries.</a:t>
             </a:r>
           </a:p>
         </p:txBody>

--- a/Mapped Curriculum Lessons/Grade 6/Lesson 09 - Condition Loops/Condition Loops - Slides.pptx
+++ b/Mapped Curriculum Lessons/Grade 6/Lesson 09 - Condition Loops/Condition Loops - Slides.pptx
@@ -2,28 +2,28 @@
 <file path=ppt/presentation.xml><?xml version="1.0" encoding="utf-8"?>
 <p:presentation xmlns:p="http://schemas.openxmlformats.org/presentationml/2006/main" embedTrueTypeFonts="1" saveSubsetFonts="0">
   <p:sldMasterIdLst>
-    <p:sldMasterId xmlns:r="http://schemas.openxmlformats.org/officeDocument/2006/relationships" id="2147483648" r:id="R7cb0252770334e39"/>
+    <p:sldMasterId xmlns:r="http://schemas.openxmlformats.org/officeDocument/2006/relationships" id="2147483648" r:id="R0f1e529144ed4be8"/>
   </p:sldMasterIdLst>
   <p:notesMasterIdLst>
-    <p:notesMasterId xmlns:r="http://schemas.openxmlformats.org/officeDocument/2006/relationships" r:id="Rac06a949a8fb42ac"/>
+    <p:notesMasterId xmlns:r="http://schemas.openxmlformats.org/officeDocument/2006/relationships" r:id="R5140b687e3b548cf"/>
   </p:notesMasterIdLst>
   <p:sldIdLst>
-    <p:sldId xmlns:r="http://schemas.openxmlformats.org/officeDocument/2006/relationships" id="256" r:id="R461bfca9b8824614"/>
-    <p:sldId xmlns:r="http://schemas.openxmlformats.org/officeDocument/2006/relationships" id="257" r:id="Rd603734444bb45e3"/>
-    <p:sldId xmlns:r="http://schemas.openxmlformats.org/officeDocument/2006/relationships" id="258" r:id="Rf1976f0104c2441f"/>
-    <p:sldId xmlns:r="http://schemas.openxmlformats.org/officeDocument/2006/relationships" id="259" r:id="R6a4648f8150b4a0f"/>
-    <p:sldId xmlns:r="http://schemas.openxmlformats.org/officeDocument/2006/relationships" id="260" r:id="R8be46c39f4d34a31"/>
-    <p:sldId xmlns:r="http://schemas.openxmlformats.org/officeDocument/2006/relationships" id="261" r:id="R731f4fe7129949fa"/>
-    <p:sldId xmlns:r="http://schemas.openxmlformats.org/officeDocument/2006/relationships" id="262" r:id="Rae30b0528bd34cfb"/>
-    <p:sldId xmlns:r="http://schemas.openxmlformats.org/officeDocument/2006/relationships" id="263" r:id="Re914731971934bfc"/>
-    <p:sldId xmlns:r="http://schemas.openxmlformats.org/officeDocument/2006/relationships" id="264" r:id="R5b4858318b674506"/>
+    <p:sldId xmlns:r="http://schemas.openxmlformats.org/officeDocument/2006/relationships" id="256" r:id="R729eb39b1e14449e"/>
+    <p:sldId xmlns:r="http://schemas.openxmlformats.org/officeDocument/2006/relationships" id="257" r:id="R60ff76491f0d4305"/>
+    <p:sldId xmlns:r="http://schemas.openxmlformats.org/officeDocument/2006/relationships" id="258" r:id="R847631b7595e4269"/>
+    <p:sldId xmlns:r="http://schemas.openxmlformats.org/officeDocument/2006/relationships" id="259" r:id="Ree2bcc46e8ed4f17"/>
+    <p:sldId xmlns:r="http://schemas.openxmlformats.org/officeDocument/2006/relationships" id="260" r:id="Rcf2dd50a8d8f4320"/>
+    <p:sldId xmlns:r="http://schemas.openxmlformats.org/officeDocument/2006/relationships" id="261" r:id="R44d4a8a144d141c0"/>
+    <p:sldId xmlns:r="http://schemas.openxmlformats.org/officeDocument/2006/relationships" id="262" r:id="Rc2be5b21e31049d0"/>
+    <p:sldId xmlns:r="http://schemas.openxmlformats.org/officeDocument/2006/relationships" id="263" r:id="Rd32a98cb40b04fac"/>
+    <p:sldId xmlns:r="http://schemas.openxmlformats.org/officeDocument/2006/relationships" id="264" r:id="R244e6e210f5846bd"/>
   </p:sldIdLst>
   <p:sldSz cx="12192000" cy="6858000"/>
   <p:notesSz cx="6858000" cy="9144000"/>
   <p:embeddedFontLst>
     <p:embeddedFont>
       <p:font typeface="JetBrains Mono"/>
-      <p:regular xmlns:r="http://schemas.openxmlformats.org/officeDocument/2006/relationships" r:id="Rcb8c198411954a4e"/>
+      <p:regular xmlns:r="http://schemas.openxmlformats.org/officeDocument/2006/relationships" r:id="R48d2ac66fd6543c4"/>
     </p:embeddedFont>
   </p:embeddedFontLst>
 </p:presentation>
@@ -1071,7 +1071,7 @@
           <p:nvPr/>
         </p:nvPicPr>
         <p:blipFill rotWithShape="1">
-          <a:blip xmlns:r="http://schemas.openxmlformats.org/officeDocument/2006/relationships" xmlns:a="http://schemas.openxmlformats.org/drawingml/2006/main" r:embed="R506611feb8e54706"/>
+          <a:blip xmlns:r="http://schemas.openxmlformats.org/officeDocument/2006/relationships" xmlns:a="http://schemas.openxmlformats.org/drawingml/2006/main" r:embed="Rd228716876024804"/>
           <a:stretch xmlns:a="http://schemas.openxmlformats.org/drawingml/2006/main"/>
         </p:blipFill>
         <p:spPr>
@@ -1451,7 +1451,7 @@
           <p:nvPr/>
         </p:nvPicPr>
         <p:blipFill rotWithShape="1">
-          <a:blip xmlns:r="http://schemas.openxmlformats.org/officeDocument/2006/relationships" xmlns:a="http://schemas.openxmlformats.org/drawingml/2006/main" r:embed="R4c2c98287e074659">
+          <a:blip xmlns:r="http://schemas.openxmlformats.org/officeDocument/2006/relationships" xmlns:a="http://schemas.openxmlformats.org/drawingml/2006/main" r:embed="Rf1687f87411a4947">
             <a:alphaModFix amt="28000"/>
           </a:blip>
           <a:stretch xmlns:a="http://schemas.openxmlformats.org/drawingml/2006/main"/>
@@ -1664,7 +1664,7 @@
           <p:nvPr/>
         </p:nvPicPr>
         <p:blipFill rotWithShape="1">
-          <a:blip xmlns:r="http://schemas.openxmlformats.org/officeDocument/2006/relationships" xmlns:a="http://schemas.openxmlformats.org/drawingml/2006/main" r:embed="Rf54e7e23ab0545ca">
+          <a:blip xmlns:r="http://schemas.openxmlformats.org/officeDocument/2006/relationships" xmlns:a="http://schemas.openxmlformats.org/drawingml/2006/main" r:embed="R9ee967e3d5c04478">
             <a:alphaModFix amt="28000"/>
           </a:blip>
           <a:stretch xmlns:a="http://schemas.openxmlformats.org/drawingml/2006/main"/>
@@ -1899,7 +1899,7 @@
           <p:nvPr/>
         </p:nvPicPr>
         <p:blipFill rotWithShape="1">
-          <a:blip xmlns:r="http://schemas.openxmlformats.org/officeDocument/2006/relationships" xmlns:a="http://schemas.openxmlformats.org/drawingml/2006/main" r:embed="R708c431301d844ff">
+          <a:blip xmlns:r="http://schemas.openxmlformats.org/officeDocument/2006/relationships" xmlns:a="http://schemas.openxmlformats.org/drawingml/2006/main" r:embed="R2e682f9c7d0e4c42">
             <a:alphaModFix amt="28000"/>
           </a:blip>
           <a:stretch xmlns:a="http://schemas.openxmlformats.org/drawingml/2006/main"/>
@@ -2176,7 +2176,7 @@
           <p:nvPr/>
         </p:nvPicPr>
         <p:blipFill rotWithShape="1">
-          <a:blip xmlns:r="http://schemas.openxmlformats.org/officeDocument/2006/relationships" xmlns:a="http://schemas.openxmlformats.org/drawingml/2006/main" r:embed="R85b3b62004c642ad">
+          <a:blip xmlns:r="http://schemas.openxmlformats.org/officeDocument/2006/relationships" xmlns:a="http://schemas.openxmlformats.org/drawingml/2006/main" r:embed="R5fee070e01a840d1">
             <a:alphaModFix amt="28000"/>
           </a:blip>
           <a:stretch xmlns:a="http://schemas.openxmlformats.org/drawingml/2006/main"/>
@@ -2451,7 +2451,7 @@
           <p:nvPr/>
         </p:nvPicPr>
         <p:blipFill rotWithShape="1">
-          <a:blip xmlns:r="http://schemas.openxmlformats.org/officeDocument/2006/relationships" xmlns:a="http://schemas.openxmlformats.org/drawingml/2006/main" r:embed="R3ffcbca0246040d6">
+          <a:blip xmlns:r="http://schemas.openxmlformats.org/officeDocument/2006/relationships" xmlns:a="http://schemas.openxmlformats.org/drawingml/2006/main" r:embed="R60bcdb4088f44517">
             <a:alphaModFix amt="28000"/>
           </a:blip>
           <a:stretch xmlns:a="http://schemas.openxmlformats.org/drawingml/2006/main"/>
@@ -2875,7 +2875,7 @@
           <p:nvPr/>
         </p:nvPicPr>
         <p:blipFill rotWithShape="1">
-          <a:blip xmlns:r="http://schemas.openxmlformats.org/officeDocument/2006/relationships" xmlns:a="http://schemas.openxmlformats.org/drawingml/2006/main" r:embed="R82a7ec0d76ca4b0b">
+          <a:blip xmlns:r="http://schemas.openxmlformats.org/officeDocument/2006/relationships" xmlns:a="http://schemas.openxmlformats.org/drawingml/2006/main" r:embed="R1f3f6dd0ed714916">
             <a:alphaModFix amt="28000"/>
           </a:blip>
           <a:stretch xmlns:a="http://schemas.openxmlformats.org/drawingml/2006/main"/>
@@ -3016,7 +3016,7 @@
           <p:nvPr/>
         </p:nvPicPr>
         <p:blipFill rotWithShape="1">
-          <a:blip xmlns:r="http://schemas.openxmlformats.org/officeDocument/2006/relationships" xmlns:a="http://schemas.openxmlformats.org/drawingml/2006/main" r:embed="R17ea85aed3c54bd4">
+          <a:blip xmlns:r="http://schemas.openxmlformats.org/officeDocument/2006/relationships" xmlns:a="http://schemas.openxmlformats.org/drawingml/2006/main" r:embed="R989f06f8c74544e3">
             <a:alphaModFix amt="28000"/>
           </a:blip>
           <a:stretch xmlns:a="http://schemas.openxmlformats.org/drawingml/2006/main"/>
@@ -3130,7 +3130,7 @@
           <p:nvPr/>
         </p:nvPicPr>
         <p:blipFill rotWithShape="1">
-          <a:blip xmlns:r="http://schemas.openxmlformats.org/officeDocument/2006/relationships" xmlns:a="http://schemas.openxmlformats.org/drawingml/2006/main" r:embed="R0a56222a51414015">
+          <a:blip xmlns:r="http://schemas.openxmlformats.org/officeDocument/2006/relationships" xmlns:a="http://schemas.openxmlformats.org/drawingml/2006/main" r:embed="Rd63655ba0a8e4437">
             <a:alphaModFix amt="28000"/>
           </a:blip>
           <a:stretch xmlns:a="http://schemas.openxmlformats.org/drawingml/2006/main"/>
@@ -3457,7 +3457,7 @@
           <p:nvPr/>
         </p:nvPicPr>
         <p:blipFill rotWithShape="1">
-          <a:blip xmlns:r="http://schemas.openxmlformats.org/officeDocument/2006/relationships" xmlns:a="http://schemas.openxmlformats.org/drawingml/2006/main" r:embed="R784480e9bf70440c">
+          <a:blip xmlns:r="http://schemas.openxmlformats.org/officeDocument/2006/relationships" xmlns:a="http://schemas.openxmlformats.org/drawingml/2006/main" r:embed="R8df2e1dac2384ff1">
             <a:alphaModFix amt="28000"/>
           </a:blip>
           <a:stretch xmlns:a="http://schemas.openxmlformats.org/drawingml/2006/main"/>
@@ -3745,7 +3745,7 @@
           <p:nvPr/>
         </p:nvPicPr>
         <p:blipFill rotWithShape="1">
-          <a:blip xmlns:r="http://schemas.openxmlformats.org/officeDocument/2006/relationships" xmlns:a="http://schemas.openxmlformats.org/drawingml/2006/main" r:embed="R55a445607a3c4c25">
+          <a:blip xmlns:r="http://schemas.openxmlformats.org/officeDocument/2006/relationships" xmlns:a="http://schemas.openxmlformats.org/drawingml/2006/main" r:embed="Re3daa741df9f4eff">
             <a:alphaModFix amt="28000"/>
           </a:blip>
           <a:stretch xmlns:a="http://schemas.openxmlformats.org/drawingml/2006/main"/>
@@ -3982,17 +3982,17 @@
   </p:cSld>
   <p:clrMap bg1="lt1" tx1="dk1" bg2="lt2" tx2="dk2" accent1="accent1" accent2="accent2" accent3="accent3" accent4="accent4" accent5="accent5" accent6="accent6" hlink="hlink" folHlink="folHlink"/>
   <p:sldLayoutIdLst>
-    <p:sldLayoutId xmlns:r="http://schemas.openxmlformats.org/officeDocument/2006/relationships" id="2147483649" r:id="R00549220412a4e8d"/>
-    <p:sldLayoutId xmlns:r="http://schemas.openxmlformats.org/officeDocument/2006/relationships" id="2147483650" r:id="Reb48cb218d8141fd"/>
-    <p:sldLayoutId xmlns:r="http://schemas.openxmlformats.org/officeDocument/2006/relationships" id="2147483651" r:id="R5c7f08b991fd41a3"/>
-    <p:sldLayoutId xmlns:r="http://schemas.openxmlformats.org/officeDocument/2006/relationships" id="2147483652" r:id="Rdc167078eabd404a"/>
-    <p:sldLayoutId xmlns:r="http://schemas.openxmlformats.org/officeDocument/2006/relationships" id="2147483653" r:id="Rf0bd14df6596426a"/>
-    <p:sldLayoutId xmlns:r="http://schemas.openxmlformats.org/officeDocument/2006/relationships" id="2147483654" r:id="R45df11e2cfc14656"/>
-    <p:sldLayoutId xmlns:r="http://schemas.openxmlformats.org/officeDocument/2006/relationships" id="2147483655" r:id="Rf268e133bbc74801"/>
-    <p:sldLayoutId xmlns:r="http://schemas.openxmlformats.org/officeDocument/2006/relationships" id="2147483656" r:id="R68916bc8a0c54f4f"/>
-    <p:sldLayoutId xmlns:r="http://schemas.openxmlformats.org/officeDocument/2006/relationships" id="2147483657" r:id="Rcde709861c834177"/>
-    <p:sldLayoutId xmlns:r="http://schemas.openxmlformats.org/officeDocument/2006/relationships" id="2147483658" r:id="Re82104030ed14416"/>
-    <p:sldLayoutId xmlns:r="http://schemas.openxmlformats.org/officeDocument/2006/relationships" id="2147483659" r:id="R34c5e8520fb948a8"/>
+    <p:sldLayoutId xmlns:r="http://schemas.openxmlformats.org/officeDocument/2006/relationships" id="2147483649" r:id="R0c049b8170e64b93"/>
+    <p:sldLayoutId xmlns:r="http://schemas.openxmlformats.org/officeDocument/2006/relationships" id="2147483650" r:id="Rdb104da063394f98"/>
+    <p:sldLayoutId xmlns:r="http://schemas.openxmlformats.org/officeDocument/2006/relationships" id="2147483651" r:id="R086e966c34f74d44"/>
+    <p:sldLayoutId xmlns:r="http://schemas.openxmlformats.org/officeDocument/2006/relationships" id="2147483652" r:id="R92501ce68fa5418b"/>
+    <p:sldLayoutId xmlns:r="http://schemas.openxmlformats.org/officeDocument/2006/relationships" id="2147483653" r:id="Ra27d8e82d3f244b7"/>
+    <p:sldLayoutId xmlns:r="http://schemas.openxmlformats.org/officeDocument/2006/relationships" id="2147483654" r:id="Rda1bca6fdc89441f"/>
+    <p:sldLayoutId xmlns:r="http://schemas.openxmlformats.org/officeDocument/2006/relationships" id="2147483655" r:id="R71af6029e78f4a86"/>
+    <p:sldLayoutId xmlns:r="http://schemas.openxmlformats.org/officeDocument/2006/relationships" id="2147483656" r:id="R3b222f2e8b674382"/>
+    <p:sldLayoutId xmlns:r="http://schemas.openxmlformats.org/officeDocument/2006/relationships" id="2147483657" r:id="R6aaad299479d470a"/>
+    <p:sldLayoutId xmlns:r="http://schemas.openxmlformats.org/officeDocument/2006/relationships" id="2147483658" r:id="R214773dd2a1b4386"/>
+    <p:sldLayoutId xmlns:r="http://schemas.openxmlformats.org/officeDocument/2006/relationships" id="2147483659" r:id="Rbfef5207c56c4ebf"/>
   </p:sldLayoutIdLst>
   <p:hf hdr="0" ftr="0" dt="0"/>
   <p:txStyles>
@@ -7407,7 +7407,139 @@
                 <a:ea typeface="Calibri"/>
                 <a:cs typeface="Calibri"/>
               </a:rPr>
-              <a:t>Change the program so the user has two attempts. Test one run by guessing 7 first and another with two wrong guesses. The program should display 1 try and 2 tries.</a:t>
+              <a:t>Change the maximum number of attempts from 3 to 2. Change the final output to display </a:t>
+            </a:r>
+            <a:r>
+              <a:rPr sz="2400" b="0">
+                <a:solidFill>
+                  <a:srgbClr val="067D17"/>
+                </a:solidFill>
+                <a:latin typeface="JetBrains Mono"/>
+                <a:ea typeface="JetBrains Mono"/>
+                <a:cs typeface="JetBrains Mono"/>
+              </a:rPr>
+              <a:t>"Attempts used:"</a:t>
+            </a:r>
+            <a:r>
+              <a:rPr sz="2400" b="0">
+                <a:solidFill>
+                  <a:srgbClr val="080808"/>
+                </a:solidFill>
+                <a:latin typeface="Calibri"/>
+                <a:ea typeface="Calibri"/>
+                <a:cs typeface="Calibri"/>
+              </a:rPr>
+              <a:t> followed by [attempts]. Test </a:t>
+            </a:r>
+            <a:r>
+              <a:rPr sz="2400" b="0">
+                <a:solidFill>
+                  <a:srgbClr val="067D17"/>
+                </a:solidFill>
+                <a:latin typeface="JetBrains Mono"/>
+                <a:ea typeface="JetBrains Mono"/>
+                <a:cs typeface="JetBrains Mono"/>
+              </a:rPr>
+              <a:t>"7"</a:t>
+            </a:r>
+            <a:r>
+              <a:rPr sz="2400" b="0">
+                <a:solidFill>
+                  <a:srgbClr val="080808"/>
+                </a:solidFill>
+                <a:latin typeface="Calibri"/>
+                <a:ea typeface="Calibri"/>
+                <a:cs typeface="Calibri"/>
+              </a:rPr>
+              <a:t>; display </a:t>
+            </a:r>
+            <a:r>
+              <a:rPr sz="2400" b="0">
+                <a:solidFill>
+                  <a:srgbClr val="067D17"/>
+                </a:solidFill>
+                <a:latin typeface="JetBrains Mono"/>
+                <a:ea typeface="JetBrains Mono"/>
+                <a:cs typeface="JetBrains Mono"/>
+              </a:rPr>
+              <a:t>"Attempts used: 1"</a:t>
+            </a:r>
+            <a:r>
+              <a:rPr sz="2400" b="0">
+                <a:solidFill>
+                  <a:srgbClr val="080808"/>
+                </a:solidFill>
+                <a:latin typeface="Calibri"/>
+                <a:ea typeface="Calibri"/>
+                <a:cs typeface="Calibri"/>
+              </a:rPr>
+              <a:t>. Test </a:t>
+            </a:r>
+            <a:r>
+              <a:rPr sz="2400" b="0">
+                <a:solidFill>
+                  <a:srgbClr val="067D17"/>
+                </a:solidFill>
+                <a:latin typeface="JetBrains Mono"/>
+                <a:ea typeface="JetBrains Mono"/>
+                <a:cs typeface="JetBrains Mono"/>
+              </a:rPr>
+              <a:t>"4"</a:t>
+            </a:r>
+            <a:r>
+              <a:rPr sz="2400" b="0">
+                <a:solidFill>
+                  <a:srgbClr val="080808"/>
+                </a:solidFill>
+                <a:latin typeface="Calibri"/>
+                <a:ea typeface="Calibri"/>
+                <a:cs typeface="Calibri"/>
+              </a:rPr>
+              <a:t> and </a:t>
+            </a:r>
+            <a:r>
+              <a:rPr sz="2400" b="0">
+                <a:solidFill>
+                  <a:srgbClr val="067D17"/>
+                </a:solidFill>
+                <a:latin typeface="JetBrains Mono"/>
+                <a:ea typeface="JetBrains Mono"/>
+                <a:cs typeface="JetBrains Mono"/>
+              </a:rPr>
+              <a:t>"5"</a:t>
+            </a:r>
+            <a:r>
+              <a:rPr sz="2400" b="0">
+                <a:solidFill>
+                  <a:srgbClr val="080808"/>
+                </a:solidFill>
+                <a:latin typeface="Calibri"/>
+                <a:ea typeface="Calibri"/>
+                <a:cs typeface="Calibri"/>
+              </a:rPr>
+              <a:t>; display </a:t>
+            </a:r>
+            <a:r>
+              <a:rPr sz="2400" b="0">
+                <a:solidFill>
+                  <a:srgbClr val="067D17"/>
+                </a:solidFill>
+                <a:latin typeface="JetBrains Mono"/>
+                <a:ea typeface="JetBrains Mono"/>
+                <a:cs typeface="JetBrains Mono"/>
+              </a:rPr>
+              <a:t>"Attempts used: 2"</a:t>
+            </a:r>
+            <a:r>
+              <a:rPr sz="2400" b="0">
+                <a:solidFill>
+                  <a:srgbClr val="080808"/>
+                </a:solidFill>
+                <a:latin typeface="Calibri"/>
+                <a:ea typeface="Calibri"/>
+                <a:cs typeface="Calibri"/>
+              </a:rPr>
+              <a:t>.</a:t>
             </a:r>
           </a:p>
         </p:txBody>
@@ -8808,7 +8940,7 @@
         </p:spPr>
         <p:txBody>
           <a:bodyPr xmlns:a="http://schemas.openxmlformats.org/drawingml/2006/main">
-            <a:normAutofit fontScale="100000"/>
+            <a:normAutofit fontScale="92683"/>
           </a:bodyPr>
           <a:lstStyle xmlns:a="http://schemas.openxmlformats.org/drawingml/2006/main"/>
           <a:p xmlns:a="http://schemas.openxmlformats.org/drawingml/2006/main">
@@ -8827,18 +8959,18 @@
                 <a:ea typeface="Calibri"/>
                 <a:cs typeface="Calibri"/>
               </a:rPr>
-              <a:t>Create a door-code checker with a </a:t>
+              <a:t>Store </a:t>
             </a:r>
             <a:r>
               <a:rPr sz="2400" b="0">
                 <a:solidFill>
-                  <a:srgbClr val="1750EB"/>
-                </a:solidFill>
-                <a:latin typeface="JetBrains Mono"/>
-                <a:ea typeface="JetBrains Mono"/>
-                <a:cs typeface="JetBrains Mono"/>
-              </a:rPr>
-              <a:t>while</a:t>
+                  <a:srgbClr val="067D17"/>
+                </a:solidFill>
+                <a:latin typeface="JetBrains Mono"/>
+                <a:ea typeface="JetBrains Mono"/>
+                <a:cs typeface="JetBrains Mono"/>
+              </a:rPr>
+              <a:t>"open"</a:t>
             </a:r>
             <a:r>
               <a:rPr sz="2400" b="0">
@@ -8849,18 +8981,18 @@
                 <a:ea typeface="Calibri"/>
                 <a:cs typeface="Calibri"/>
               </a:rPr>
-              <a:t> loop that allows at most three attempts. Stop early when </a:t>
+              <a:t> in [password]. Use a </a:t>
             </a:r>
             <a:r>
               <a:rPr sz="2400" b="0">
                 <a:solidFill>
-                  <a:srgbClr val="067D17"/>
-                </a:solidFill>
-                <a:latin typeface="JetBrains Mono"/>
-                <a:ea typeface="JetBrains Mono"/>
-                <a:cs typeface="JetBrains Mono"/>
-              </a:rPr>
-              <a:t>"open"</a:t>
+                  <a:srgbClr val="1750EB"/>
+                </a:solidFill>
+                <a:latin typeface="JetBrains Mono"/>
+                <a:ea typeface="JetBrains Mono"/>
+                <a:cs typeface="JetBrains Mono"/>
+              </a:rPr>
+              <a:t>while</a:t>
             </a:r>
             <a:r>
               <a:rPr sz="2400" b="0">
@@ -8871,7 +9003,161 @@
                 <a:ea typeface="Calibri"/>
                 <a:cs typeface="Calibri"/>
               </a:rPr>
-              <a:t> is entered, then display either a success message or a final locked message with the attempts used.</a:t>
+              <a:t> loop to ask for a door code until the user enters </a:t>
+            </a:r>
+            <a:r>
+              <a:rPr sz="2400" b="0">
+                <a:solidFill>
+                  <a:srgbClr val="067D17"/>
+                </a:solidFill>
+                <a:latin typeface="JetBrains Mono"/>
+                <a:ea typeface="JetBrains Mono"/>
+                <a:cs typeface="JetBrains Mono"/>
+              </a:rPr>
+              <a:t>"open"</a:t>
+            </a:r>
+            <a:r>
+              <a:rPr sz="2400" b="0">
+                <a:solidFill>
+                  <a:srgbClr val="080808"/>
+                </a:solidFill>
+                <a:latin typeface="Calibri"/>
+                <a:ea typeface="Calibri"/>
+                <a:cs typeface="Calibri"/>
+              </a:rPr>
+              <a:t> or [attempts] reaches 3. Add 1 to [attempts] after each answer. Test </a:t>
+            </a:r>
+            <a:r>
+              <a:rPr sz="2400" b="0">
+                <a:solidFill>
+                  <a:srgbClr val="067D17"/>
+                </a:solidFill>
+                <a:latin typeface="JetBrains Mono"/>
+                <a:ea typeface="JetBrains Mono"/>
+                <a:cs typeface="JetBrains Mono"/>
+              </a:rPr>
+              <a:t>"open"</a:t>
+            </a:r>
+            <a:r>
+              <a:rPr sz="2400" b="0">
+                <a:solidFill>
+                  <a:srgbClr val="080808"/>
+                </a:solidFill>
+                <a:latin typeface="Calibri"/>
+                <a:ea typeface="Calibri"/>
+                <a:cs typeface="Calibri"/>
+              </a:rPr>
+              <a:t>; display </a:t>
+            </a:r>
+            <a:r>
+              <a:rPr sz="2400" b="0">
+                <a:solidFill>
+                  <a:srgbClr val="067D17"/>
+                </a:solidFill>
+                <a:latin typeface="JetBrains Mono"/>
+                <a:ea typeface="JetBrains Mono"/>
+                <a:cs typeface="JetBrains Mono"/>
+              </a:rPr>
+              <a:t>"Door opened. Attempts used: 1"</a:t>
+            </a:r>
+            <a:r>
+              <a:rPr sz="2400" b="0">
+                <a:solidFill>
+                  <a:srgbClr val="080808"/>
+                </a:solidFill>
+                <a:latin typeface="Calibri"/>
+                <a:ea typeface="Calibri"/>
+                <a:cs typeface="Calibri"/>
+              </a:rPr>
+              <a:t>. Test </a:t>
+            </a:r>
+            <a:r>
+              <a:rPr sz="2400" b="0">
+                <a:solidFill>
+                  <a:srgbClr val="067D17"/>
+                </a:solidFill>
+                <a:latin typeface="JetBrains Mono"/>
+                <a:ea typeface="JetBrains Mono"/>
+                <a:cs typeface="JetBrains Mono"/>
+              </a:rPr>
+              <a:t>"red"</a:t>
+            </a:r>
+            <a:r>
+              <a:rPr sz="2400" b="0">
+                <a:solidFill>
+                  <a:srgbClr val="080808"/>
+                </a:solidFill>
+                <a:latin typeface="Calibri"/>
+                <a:ea typeface="Calibri"/>
+                <a:cs typeface="Calibri"/>
+              </a:rPr>
+              <a:t>, </a:t>
+            </a:r>
+            <a:r>
+              <a:rPr sz="2400" b="0">
+                <a:solidFill>
+                  <a:srgbClr val="067D17"/>
+                </a:solidFill>
+                <a:latin typeface="JetBrains Mono"/>
+                <a:ea typeface="JetBrains Mono"/>
+                <a:cs typeface="JetBrains Mono"/>
+              </a:rPr>
+              <a:t>"blue"</a:t>
+            </a:r>
+            <a:r>
+              <a:rPr sz="2400" b="0">
+                <a:solidFill>
+                  <a:srgbClr val="080808"/>
+                </a:solidFill>
+                <a:latin typeface="Calibri"/>
+                <a:ea typeface="Calibri"/>
+                <a:cs typeface="Calibri"/>
+              </a:rPr>
+              <a:t> and </a:t>
+            </a:r>
+            <a:r>
+              <a:rPr sz="2400" b="0">
+                <a:solidFill>
+                  <a:srgbClr val="067D17"/>
+                </a:solidFill>
+                <a:latin typeface="JetBrains Mono"/>
+                <a:ea typeface="JetBrains Mono"/>
+                <a:cs typeface="JetBrains Mono"/>
+              </a:rPr>
+              <a:t>"green"</a:t>
+            </a:r>
+            <a:r>
+              <a:rPr sz="2400" b="0">
+                <a:solidFill>
+                  <a:srgbClr val="080808"/>
+                </a:solidFill>
+                <a:latin typeface="Calibri"/>
+                <a:ea typeface="Calibri"/>
+                <a:cs typeface="Calibri"/>
+              </a:rPr>
+              <a:t>; display </a:t>
+            </a:r>
+            <a:r>
+              <a:rPr sz="2400" b="0">
+                <a:solidFill>
+                  <a:srgbClr val="067D17"/>
+                </a:solidFill>
+                <a:latin typeface="JetBrains Mono"/>
+                <a:ea typeface="JetBrains Mono"/>
+                <a:cs typeface="JetBrains Mono"/>
+              </a:rPr>
+              <a:t>"Door locked. Attempts used: 3"</a:t>
+            </a:r>
+            <a:r>
+              <a:rPr sz="2400" b="0">
+                <a:solidFill>
+                  <a:srgbClr val="080808"/>
+                </a:solidFill>
+                <a:latin typeface="Calibri"/>
+                <a:ea typeface="Calibri"/>
+                <a:cs typeface="Calibri"/>
+              </a:rPr>
+              <a:t>.</a:t>
             </a:r>
           </a:p>
         </p:txBody>

--- a/Mapped Curriculum Lessons/Grade 6/Lesson 09 - Condition Loops/Condition Loops - Slides.pptx
+++ b/Mapped Curriculum Lessons/Grade 6/Lesson 09 - Condition Loops/Condition Loops - Slides.pptx
@@ -2,28 +2,28 @@
 <file path=ppt/presentation.xml><?xml version="1.0" encoding="utf-8"?>
 <p:presentation xmlns:p="http://schemas.openxmlformats.org/presentationml/2006/main" embedTrueTypeFonts="1" saveSubsetFonts="0">
   <p:sldMasterIdLst>
-    <p:sldMasterId xmlns:r="http://schemas.openxmlformats.org/officeDocument/2006/relationships" id="2147483648" r:id="R0f1e529144ed4be8"/>
+    <p:sldMasterId xmlns:r="http://schemas.openxmlformats.org/officeDocument/2006/relationships" id="2147483648" r:id="Re243026a39e744d8"/>
   </p:sldMasterIdLst>
   <p:notesMasterIdLst>
-    <p:notesMasterId xmlns:r="http://schemas.openxmlformats.org/officeDocument/2006/relationships" r:id="R5140b687e3b548cf"/>
+    <p:notesMasterId xmlns:r="http://schemas.openxmlformats.org/officeDocument/2006/relationships" r:id="R9af62b6119434a73"/>
   </p:notesMasterIdLst>
   <p:sldIdLst>
-    <p:sldId xmlns:r="http://schemas.openxmlformats.org/officeDocument/2006/relationships" id="256" r:id="R729eb39b1e14449e"/>
-    <p:sldId xmlns:r="http://schemas.openxmlformats.org/officeDocument/2006/relationships" id="257" r:id="R60ff76491f0d4305"/>
-    <p:sldId xmlns:r="http://schemas.openxmlformats.org/officeDocument/2006/relationships" id="258" r:id="R847631b7595e4269"/>
-    <p:sldId xmlns:r="http://schemas.openxmlformats.org/officeDocument/2006/relationships" id="259" r:id="Ree2bcc46e8ed4f17"/>
-    <p:sldId xmlns:r="http://schemas.openxmlformats.org/officeDocument/2006/relationships" id="260" r:id="Rcf2dd50a8d8f4320"/>
-    <p:sldId xmlns:r="http://schemas.openxmlformats.org/officeDocument/2006/relationships" id="261" r:id="R44d4a8a144d141c0"/>
-    <p:sldId xmlns:r="http://schemas.openxmlformats.org/officeDocument/2006/relationships" id="262" r:id="Rc2be5b21e31049d0"/>
-    <p:sldId xmlns:r="http://schemas.openxmlformats.org/officeDocument/2006/relationships" id="263" r:id="Rd32a98cb40b04fac"/>
-    <p:sldId xmlns:r="http://schemas.openxmlformats.org/officeDocument/2006/relationships" id="264" r:id="R244e6e210f5846bd"/>
+    <p:sldId xmlns:r="http://schemas.openxmlformats.org/officeDocument/2006/relationships" id="256" r:id="Rba1a77db66df4708"/>
+    <p:sldId xmlns:r="http://schemas.openxmlformats.org/officeDocument/2006/relationships" id="257" r:id="Re9d209c07083458e"/>
+    <p:sldId xmlns:r="http://schemas.openxmlformats.org/officeDocument/2006/relationships" id="258" r:id="R1a0541d933e644e2"/>
+    <p:sldId xmlns:r="http://schemas.openxmlformats.org/officeDocument/2006/relationships" id="259" r:id="Rfbabc51da10042fb"/>
+    <p:sldId xmlns:r="http://schemas.openxmlformats.org/officeDocument/2006/relationships" id="260" r:id="Rdaa90c58f83342a7"/>
+    <p:sldId xmlns:r="http://schemas.openxmlformats.org/officeDocument/2006/relationships" id="261" r:id="R7a814aa3ae184eb1"/>
+    <p:sldId xmlns:r="http://schemas.openxmlformats.org/officeDocument/2006/relationships" id="262" r:id="Rc0e69b9c78ec4d26"/>
+    <p:sldId xmlns:r="http://schemas.openxmlformats.org/officeDocument/2006/relationships" id="263" r:id="R0d673d096d6c4916"/>
+    <p:sldId xmlns:r="http://schemas.openxmlformats.org/officeDocument/2006/relationships" id="264" r:id="Ra51f3f5b08dd443a"/>
   </p:sldIdLst>
   <p:sldSz cx="12192000" cy="6858000"/>
   <p:notesSz cx="6858000" cy="9144000"/>
   <p:embeddedFontLst>
     <p:embeddedFont>
       <p:font typeface="JetBrains Mono"/>
-      <p:regular xmlns:r="http://schemas.openxmlformats.org/officeDocument/2006/relationships" r:id="R48d2ac66fd6543c4"/>
+      <p:regular xmlns:r="http://schemas.openxmlformats.org/officeDocument/2006/relationships" r:id="R0b177af8f3c74ca4"/>
     </p:embeddedFont>
   </p:embeddedFontLst>
 </p:presentation>
@@ -1071,7 +1071,7 @@
           <p:nvPr/>
         </p:nvPicPr>
         <p:blipFill rotWithShape="1">
-          <a:blip xmlns:r="http://schemas.openxmlformats.org/officeDocument/2006/relationships" xmlns:a="http://schemas.openxmlformats.org/drawingml/2006/main" r:embed="Rd228716876024804"/>
+          <a:blip xmlns:r="http://schemas.openxmlformats.org/officeDocument/2006/relationships" xmlns:a="http://schemas.openxmlformats.org/drawingml/2006/main" r:embed="R3167ac073a3845f9"/>
           <a:stretch xmlns:a="http://schemas.openxmlformats.org/drawingml/2006/main"/>
         </p:blipFill>
         <p:spPr>
@@ -1451,7 +1451,7 @@
           <p:nvPr/>
         </p:nvPicPr>
         <p:blipFill rotWithShape="1">
-          <a:blip xmlns:r="http://schemas.openxmlformats.org/officeDocument/2006/relationships" xmlns:a="http://schemas.openxmlformats.org/drawingml/2006/main" r:embed="Rf1687f87411a4947">
+          <a:blip xmlns:r="http://schemas.openxmlformats.org/officeDocument/2006/relationships" xmlns:a="http://schemas.openxmlformats.org/drawingml/2006/main" r:embed="Rdb9bed8a26cf41df">
             <a:alphaModFix amt="28000"/>
           </a:blip>
           <a:stretch xmlns:a="http://schemas.openxmlformats.org/drawingml/2006/main"/>
@@ -1664,7 +1664,7 @@
           <p:nvPr/>
         </p:nvPicPr>
         <p:blipFill rotWithShape="1">
-          <a:blip xmlns:r="http://schemas.openxmlformats.org/officeDocument/2006/relationships" xmlns:a="http://schemas.openxmlformats.org/drawingml/2006/main" r:embed="R9ee967e3d5c04478">
+          <a:blip xmlns:r="http://schemas.openxmlformats.org/officeDocument/2006/relationships" xmlns:a="http://schemas.openxmlformats.org/drawingml/2006/main" r:embed="R77bd9222fff643f0">
             <a:alphaModFix amt="28000"/>
           </a:blip>
           <a:stretch xmlns:a="http://schemas.openxmlformats.org/drawingml/2006/main"/>
@@ -1899,7 +1899,7 @@
           <p:nvPr/>
         </p:nvPicPr>
         <p:blipFill rotWithShape="1">
-          <a:blip xmlns:r="http://schemas.openxmlformats.org/officeDocument/2006/relationships" xmlns:a="http://schemas.openxmlformats.org/drawingml/2006/main" r:embed="R2e682f9c7d0e4c42">
+          <a:blip xmlns:r="http://schemas.openxmlformats.org/officeDocument/2006/relationships" xmlns:a="http://schemas.openxmlformats.org/drawingml/2006/main" r:embed="R39b9d7f9dedc4a5d">
             <a:alphaModFix amt="28000"/>
           </a:blip>
           <a:stretch xmlns:a="http://schemas.openxmlformats.org/drawingml/2006/main"/>
@@ -2176,7 +2176,7 @@
           <p:nvPr/>
         </p:nvPicPr>
         <p:blipFill rotWithShape="1">
-          <a:blip xmlns:r="http://schemas.openxmlformats.org/officeDocument/2006/relationships" xmlns:a="http://schemas.openxmlformats.org/drawingml/2006/main" r:embed="R5fee070e01a840d1">
+          <a:blip xmlns:r="http://schemas.openxmlformats.org/officeDocument/2006/relationships" xmlns:a="http://schemas.openxmlformats.org/drawingml/2006/main" r:embed="Re2a3961b93f34e5e">
             <a:alphaModFix amt="28000"/>
           </a:blip>
           <a:stretch xmlns:a="http://schemas.openxmlformats.org/drawingml/2006/main"/>
@@ -2451,7 +2451,7 @@
           <p:nvPr/>
         </p:nvPicPr>
         <p:blipFill rotWithShape="1">
-          <a:blip xmlns:r="http://schemas.openxmlformats.org/officeDocument/2006/relationships" xmlns:a="http://schemas.openxmlformats.org/drawingml/2006/main" r:embed="R60bcdb4088f44517">
+          <a:blip xmlns:r="http://schemas.openxmlformats.org/officeDocument/2006/relationships" xmlns:a="http://schemas.openxmlformats.org/drawingml/2006/main" r:embed="Ra25d8cba69ec44b6">
             <a:alphaModFix amt="28000"/>
           </a:blip>
           <a:stretch xmlns:a="http://schemas.openxmlformats.org/drawingml/2006/main"/>
@@ -2875,7 +2875,7 @@
           <p:nvPr/>
         </p:nvPicPr>
         <p:blipFill rotWithShape="1">
-          <a:blip xmlns:r="http://schemas.openxmlformats.org/officeDocument/2006/relationships" xmlns:a="http://schemas.openxmlformats.org/drawingml/2006/main" r:embed="R1f3f6dd0ed714916">
+          <a:blip xmlns:r="http://schemas.openxmlformats.org/officeDocument/2006/relationships" xmlns:a="http://schemas.openxmlformats.org/drawingml/2006/main" r:embed="R53fb17f159554c12">
             <a:alphaModFix amt="28000"/>
           </a:blip>
           <a:stretch xmlns:a="http://schemas.openxmlformats.org/drawingml/2006/main"/>
@@ -3016,7 +3016,7 @@
           <p:nvPr/>
         </p:nvPicPr>
         <p:blipFill rotWithShape="1">
-          <a:blip xmlns:r="http://schemas.openxmlformats.org/officeDocument/2006/relationships" xmlns:a="http://schemas.openxmlformats.org/drawingml/2006/main" r:embed="R989f06f8c74544e3">
+          <a:blip xmlns:r="http://schemas.openxmlformats.org/officeDocument/2006/relationships" xmlns:a="http://schemas.openxmlformats.org/drawingml/2006/main" r:embed="R730aa03ca7fd4ff1">
             <a:alphaModFix amt="28000"/>
           </a:blip>
           <a:stretch xmlns:a="http://schemas.openxmlformats.org/drawingml/2006/main"/>
@@ -3130,7 +3130,7 @@
           <p:nvPr/>
         </p:nvPicPr>
         <p:blipFill rotWithShape="1">
-          <a:blip xmlns:r="http://schemas.openxmlformats.org/officeDocument/2006/relationships" xmlns:a="http://schemas.openxmlformats.org/drawingml/2006/main" r:embed="Rd63655ba0a8e4437">
+          <a:blip xmlns:r="http://schemas.openxmlformats.org/officeDocument/2006/relationships" xmlns:a="http://schemas.openxmlformats.org/drawingml/2006/main" r:embed="R2c8c32732a1e44eb">
             <a:alphaModFix amt="28000"/>
           </a:blip>
           <a:stretch xmlns:a="http://schemas.openxmlformats.org/drawingml/2006/main"/>
@@ -3457,7 +3457,7 @@
           <p:nvPr/>
         </p:nvPicPr>
         <p:blipFill rotWithShape="1">
-          <a:blip xmlns:r="http://schemas.openxmlformats.org/officeDocument/2006/relationships" xmlns:a="http://schemas.openxmlformats.org/drawingml/2006/main" r:embed="R8df2e1dac2384ff1">
+          <a:blip xmlns:r="http://schemas.openxmlformats.org/officeDocument/2006/relationships" xmlns:a="http://schemas.openxmlformats.org/drawingml/2006/main" r:embed="R9455138d60054a65">
             <a:alphaModFix amt="28000"/>
           </a:blip>
           <a:stretch xmlns:a="http://schemas.openxmlformats.org/drawingml/2006/main"/>
@@ -3745,7 +3745,7 @@
           <p:nvPr/>
         </p:nvPicPr>
         <p:blipFill rotWithShape="1">
-          <a:blip xmlns:r="http://schemas.openxmlformats.org/officeDocument/2006/relationships" xmlns:a="http://schemas.openxmlformats.org/drawingml/2006/main" r:embed="Re3daa741df9f4eff">
+          <a:blip xmlns:r="http://schemas.openxmlformats.org/officeDocument/2006/relationships" xmlns:a="http://schemas.openxmlformats.org/drawingml/2006/main" r:embed="Ra978dee07e084e5b">
             <a:alphaModFix amt="28000"/>
           </a:blip>
           <a:stretch xmlns:a="http://schemas.openxmlformats.org/drawingml/2006/main"/>
@@ -3982,17 +3982,17 @@
   </p:cSld>
   <p:clrMap bg1="lt1" tx1="dk1" bg2="lt2" tx2="dk2" accent1="accent1" accent2="accent2" accent3="accent3" accent4="accent4" accent5="accent5" accent6="accent6" hlink="hlink" folHlink="folHlink"/>
   <p:sldLayoutIdLst>
-    <p:sldLayoutId xmlns:r="http://schemas.openxmlformats.org/officeDocument/2006/relationships" id="2147483649" r:id="R0c049b8170e64b93"/>
-    <p:sldLayoutId xmlns:r="http://schemas.openxmlformats.org/officeDocument/2006/relationships" id="2147483650" r:id="Rdb104da063394f98"/>
-    <p:sldLayoutId xmlns:r="http://schemas.openxmlformats.org/officeDocument/2006/relationships" id="2147483651" r:id="R086e966c34f74d44"/>
-    <p:sldLayoutId xmlns:r="http://schemas.openxmlformats.org/officeDocument/2006/relationships" id="2147483652" r:id="R92501ce68fa5418b"/>
-    <p:sldLayoutId xmlns:r="http://schemas.openxmlformats.org/officeDocument/2006/relationships" id="2147483653" r:id="Ra27d8e82d3f244b7"/>
-    <p:sldLayoutId xmlns:r="http://schemas.openxmlformats.org/officeDocument/2006/relationships" id="2147483654" r:id="Rda1bca6fdc89441f"/>
-    <p:sldLayoutId xmlns:r="http://schemas.openxmlformats.org/officeDocument/2006/relationships" id="2147483655" r:id="R71af6029e78f4a86"/>
-    <p:sldLayoutId xmlns:r="http://schemas.openxmlformats.org/officeDocument/2006/relationships" id="2147483656" r:id="R3b222f2e8b674382"/>
-    <p:sldLayoutId xmlns:r="http://schemas.openxmlformats.org/officeDocument/2006/relationships" id="2147483657" r:id="R6aaad299479d470a"/>
-    <p:sldLayoutId xmlns:r="http://schemas.openxmlformats.org/officeDocument/2006/relationships" id="2147483658" r:id="R214773dd2a1b4386"/>
-    <p:sldLayoutId xmlns:r="http://schemas.openxmlformats.org/officeDocument/2006/relationships" id="2147483659" r:id="Rbfef5207c56c4ebf"/>
+    <p:sldLayoutId xmlns:r="http://schemas.openxmlformats.org/officeDocument/2006/relationships" id="2147483649" r:id="R1a7d4bd9ad2f4585"/>
+    <p:sldLayoutId xmlns:r="http://schemas.openxmlformats.org/officeDocument/2006/relationships" id="2147483650" r:id="Re5409db6fd91481b"/>
+    <p:sldLayoutId xmlns:r="http://schemas.openxmlformats.org/officeDocument/2006/relationships" id="2147483651" r:id="Rcb2db27a0b3f44c2"/>
+    <p:sldLayoutId xmlns:r="http://schemas.openxmlformats.org/officeDocument/2006/relationships" id="2147483652" r:id="R070c979a13004f09"/>
+    <p:sldLayoutId xmlns:r="http://schemas.openxmlformats.org/officeDocument/2006/relationships" id="2147483653" r:id="Re419f09ee1464b2a"/>
+    <p:sldLayoutId xmlns:r="http://schemas.openxmlformats.org/officeDocument/2006/relationships" id="2147483654" r:id="R83bdcf49c5c84feb"/>
+    <p:sldLayoutId xmlns:r="http://schemas.openxmlformats.org/officeDocument/2006/relationships" id="2147483655" r:id="R372adc4662684cf8"/>
+    <p:sldLayoutId xmlns:r="http://schemas.openxmlformats.org/officeDocument/2006/relationships" id="2147483656" r:id="Ref3c897167d144fb"/>
+    <p:sldLayoutId xmlns:r="http://schemas.openxmlformats.org/officeDocument/2006/relationships" id="2147483657" r:id="Ra4d48853d5134fe7"/>
+    <p:sldLayoutId xmlns:r="http://schemas.openxmlformats.org/officeDocument/2006/relationships" id="2147483658" r:id="R4eb65545e2a14377"/>
+    <p:sldLayoutId xmlns:r="http://schemas.openxmlformats.org/officeDocument/2006/relationships" id="2147483659" r:id="R450c36776af048df"/>
   </p:sldLayoutIdLst>
   <p:hf hdr="0" ftr="0" dt="0"/>
   <p:txStyles>
@@ -7407,18 +7407,18 @@
                 <a:ea typeface="Calibri"/>
                 <a:cs typeface="Calibri"/>
               </a:rPr>
-              <a:t>Change the maximum number of attempts from 3 to 2. Change the final output to display </a:t>
-            </a:r>
-            <a:r>
-              <a:rPr sz="2400" b="0">
-                <a:solidFill>
-                  <a:srgbClr val="067D17"/>
-                </a:solidFill>
-                <a:latin typeface="JetBrains Mono"/>
-                <a:ea typeface="JetBrains Mono"/>
-                <a:cs typeface="JetBrains Mono"/>
-              </a:rPr>
-              <a:t>"Attempts used:"</a:t>
+              <a:t>Change the example so the final message explains why the loop stopped. After the loop, use an </a:t>
+            </a:r>
+            <a:r>
+              <a:rPr sz="2050" b="0">
+                <a:solidFill>
+                  <a:srgbClr val="1750EB"/>
+                </a:solidFill>
+                <a:latin typeface="JetBrains Mono"/>
+                <a:ea typeface="JetBrains Mono"/>
+                <a:cs typeface="JetBrains Mono"/>
+              </a:rPr>
+              <a:t>if</a:t>
             </a:r>
             <a:r>
               <a:rPr sz="2400" b="0">
@@ -7429,10 +7429,10 @@
                 <a:ea typeface="Calibri"/>
                 <a:cs typeface="Calibri"/>
               </a:rPr>
-              <a:t> followed by [attempts]. Test </a:t>
-            </a:r>
-            <a:r>
-              <a:rPr sz="2400" b="0">
+              <a:t> statement to display </a:t>
+            </a:r>
+            <a:r>
+              <a:rPr sz="2050" b="0">
                 <a:solidFill>
                   <a:srgbClr val="067D17"/>
                 </a:solidFill>
@@ -7440,7 +7440,7 @@
                 <a:ea typeface="JetBrains Mono"/>
                 <a:cs typeface="JetBrains Mono"/>
               </a:rPr>
-              <a:t>"7"</a:t>
+              <a:t>"Correct!"</a:t>
             </a:r>
             <a:r>
               <a:rPr sz="2400" b="0">
@@ -7451,18 +7451,21 @@
                 <a:ea typeface="Calibri"/>
                 <a:cs typeface="Calibri"/>
               </a:rPr>
-              <a:t>; display </a:t>
-            </a:r>
-            <a:r>
-              <a:rPr sz="2400" b="0">
-                <a:solidFill>
-                  <a:srgbClr val="067D17"/>
-                </a:solidFill>
-                <a:latin typeface="JetBrains Mono"/>
-                <a:ea typeface="JetBrains Mono"/>
-                <a:cs typeface="JetBrains Mono"/>
-              </a:rPr>
-              <a:t>"Attempts used: 1"</a:t>
+              <a:t> when </a:t>
+            </a:r>
+            <a:r>
+              <a:rPr sz="2050" b="0">
+                <a:solidFill>
+                  <a:srgbClr val="6A1B9A"/>
+                </a:solidFill>
+                <a:highlight>
+                  <a:srgbClr val="ECEAF4"/>
+                </a:highlight>
+                <a:latin typeface="JetBrains Mono"/>
+                <a:ea typeface="JetBrains Mono"/>
+                <a:cs typeface="JetBrains Mono"/>
+              </a:rPr>
+              <a:t> guess </a:t>
             </a:r>
             <a:r>
               <a:rPr sz="2400" b="0">
@@ -7473,18 +7476,21 @@
                 <a:ea typeface="Calibri"/>
                 <a:cs typeface="Calibri"/>
               </a:rPr>
-              <a:t>. Test </a:t>
-            </a:r>
-            <a:r>
-              <a:rPr sz="2400" b="0">
-                <a:solidFill>
-                  <a:srgbClr val="067D17"/>
-                </a:solidFill>
-                <a:latin typeface="JetBrains Mono"/>
-                <a:ea typeface="JetBrains Mono"/>
-                <a:cs typeface="JetBrains Mono"/>
-              </a:rPr>
-              <a:t>"4"</a:t>
+              <a:t> equals </a:t>
+            </a:r>
+            <a:r>
+              <a:rPr sz="2050" b="0">
+                <a:solidFill>
+                  <a:srgbClr val="6A1B9A"/>
+                </a:solidFill>
+                <a:highlight>
+                  <a:srgbClr val="ECEAF4"/>
+                </a:highlight>
+                <a:latin typeface="JetBrains Mono"/>
+                <a:ea typeface="JetBrains Mono"/>
+                <a:cs typeface="JetBrains Mono"/>
+              </a:rPr>
+              <a:t> target </a:t>
             </a:r>
             <a:r>
               <a:rPr sz="2400" b="0">
@@ -7495,10 +7501,10 @@
                 <a:ea typeface="Calibri"/>
                 <a:cs typeface="Calibri"/>
               </a:rPr>
-              <a:t> and </a:t>
-            </a:r>
-            <a:r>
-              <a:rPr sz="2400" b="0">
+              <a:t>; otherwise display </a:t>
+            </a:r>
+            <a:r>
+              <a:rPr sz="2050" b="0">
                 <a:solidFill>
                   <a:srgbClr val="067D17"/>
                 </a:solidFill>
@@ -7506,7 +7512,7 @@
                 <a:ea typeface="JetBrains Mono"/>
                 <a:cs typeface="JetBrains Mono"/>
               </a:rPr>
-              <a:t>"5"</a:t>
+              <a:t>"Out of guesses. It was 7."</a:t>
             </a:r>
             <a:r>
               <a:rPr sz="2400" b="0">
@@ -7517,29 +7523,7 @@
                 <a:ea typeface="Calibri"/>
                 <a:cs typeface="Calibri"/>
               </a:rPr>
-              <a:t>; display </a:t>
-            </a:r>
-            <a:r>
-              <a:rPr sz="2400" b="0">
-                <a:solidFill>
-                  <a:srgbClr val="067D17"/>
-                </a:solidFill>
-                <a:latin typeface="JetBrains Mono"/>
-                <a:ea typeface="JetBrains Mono"/>
-                <a:cs typeface="JetBrains Mono"/>
-              </a:rPr>
-              <a:t>"Attempts used: 2"</a:t>
-            </a:r>
-            <a:r>
-              <a:rPr sz="2400" b="0">
-                <a:solidFill>
-                  <a:srgbClr val="080808"/>
-                </a:solidFill>
-                <a:latin typeface="Calibri"/>
-                <a:ea typeface="Calibri"/>
-                <a:cs typeface="Calibri"/>
-              </a:rPr>
-              <a:t>.</a:t>
+              <a:t> Test 7, then test 1, 2 and 3.</a:t>
             </a:r>
           </a:p>
         </p:txBody>
@@ -8249,7 +8233,161 @@
                 <a:ea typeface="Calibri"/>
                 <a:cs typeface="Calibri"/>
               </a:rPr>
-              <a:t>Give the player five attempts. Update the finishing message to report the guesses used. Test an early correct guess and five unsuccessful guesses; both counts must be accurate.</a:t>
+              <a:t>Extend the example so each wrong guess gets a hint. Inside the </a:t>
+            </a:r>
+            <a:r>
+              <a:rPr sz="2050" b="0">
+                <a:solidFill>
+                  <a:srgbClr val="1750EB"/>
+                </a:solidFill>
+                <a:latin typeface="JetBrains Mono"/>
+                <a:ea typeface="JetBrains Mono"/>
+                <a:cs typeface="JetBrains Mono"/>
+              </a:rPr>
+              <a:t>while</a:t>
+            </a:r>
+            <a:r>
+              <a:rPr sz="2400" b="0">
+                <a:solidFill>
+                  <a:srgbClr val="080808"/>
+                </a:solidFill>
+                <a:latin typeface="Calibri"/>
+                <a:ea typeface="Calibri"/>
+                <a:cs typeface="Calibri"/>
+              </a:rPr>
+              <a:t> loop, use </a:t>
+            </a:r>
+            <a:r>
+              <a:rPr sz="2050" b="0">
+                <a:solidFill>
+                  <a:srgbClr val="1750EB"/>
+                </a:solidFill>
+                <a:latin typeface="JetBrains Mono"/>
+                <a:ea typeface="JetBrains Mono"/>
+                <a:cs typeface="JetBrains Mono"/>
+              </a:rPr>
+              <a:t>if</a:t>
+            </a:r>
+            <a:r>
+              <a:rPr sz="2400" b="0">
+                <a:solidFill>
+                  <a:srgbClr val="080808"/>
+                </a:solidFill>
+                <a:latin typeface="Calibri"/>
+                <a:ea typeface="Calibri"/>
+                <a:cs typeface="Calibri"/>
+              </a:rPr>
+              <a:t> and </a:t>
+            </a:r>
+            <a:r>
+              <a:rPr sz="2050" b="0">
+                <a:solidFill>
+                  <a:srgbClr val="1750EB"/>
+                </a:solidFill>
+                <a:latin typeface="JetBrains Mono"/>
+                <a:ea typeface="JetBrains Mono"/>
+                <a:cs typeface="JetBrains Mono"/>
+              </a:rPr>
+              <a:t>elif</a:t>
+            </a:r>
+            <a:r>
+              <a:rPr sz="2400" b="0">
+                <a:solidFill>
+                  <a:srgbClr val="080808"/>
+                </a:solidFill>
+                <a:latin typeface="Calibri"/>
+                <a:ea typeface="Calibri"/>
+                <a:cs typeface="Calibri"/>
+              </a:rPr>
+              <a:t> to display </a:t>
+            </a:r>
+            <a:r>
+              <a:rPr sz="2050" b="0">
+                <a:solidFill>
+                  <a:srgbClr val="067D17"/>
+                </a:solidFill>
+                <a:latin typeface="JetBrains Mono"/>
+                <a:ea typeface="JetBrains Mono"/>
+                <a:cs typeface="JetBrains Mono"/>
+              </a:rPr>
+              <a:t>"Too low"</a:t>
+            </a:r>
+            <a:r>
+              <a:rPr sz="2400" b="0">
+                <a:solidFill>
+                  <a:srgbClr val="080808"/>
+                </a:solidFill>
+                <a:latin typeface="Calibri"/>
+                <a:ea typeface="Calibri"/>
+                <a:cs typeface="Calibri"/>
+              </a:rPr>
+              <a:t> or </a:t>
+            </a:r>
+            <a:r>
+              <a:rPr sz="2050" b="0">
+                <a:solidFill>
+                  <a:srgbClr val="067D17"/>
+                </a:solidFill>
+                <a:latin typeface="JetBrains Mono"/>
+                <a:ea typeface="JetBrains Mono"/>
+                <a:cs typeface="JetBrains Mono"/>
+              </a:rPr>
+              <a:t>"Too high"</a:t>
+            </a:r>
+            <a:r>
+              <a:rPr sz="2400" b="0">
+                <a:solidFill>
+                  <a:srgbClr val="080808"/>
+                </a:solidFill>
+                <a:latin typeface="Calibri"/>
+                <a:ea typeface="Calibri"/>
+                <a:cs typeface="Calibri"/>
+              </a:rPr>
+              <a:t> after each guess that is not 7. For example, 5, 9 and 7 display </a:t>
+            </a:r>
+            <a:r>
+              <a:rPr sz="2050" b="0">
+                <a:solidFill>
+                  <a:srgbClr val="067D17"/>
+                </a:solidFill>
+                <a:latin typeface="JetBrains Mono"/>
+                <a:ea typeface="JetBrains Mono"/>
+                <a:cs typeface="JetBrains Mono"/>
+              </a:rPr>
+              <a:t>"Too low"</a:t>
+            </a:r>
+            <a:r>
+              <a:rPr sz="2400" b="0">
+                <a:solidFill>
+                  <a:srgbClr val="080808"/>
+                </a:solidFill>
+                <a:latin typeface="Calibri"/>
+                <a:ea typeface="Calibri"/>
+                <a:cs typeface="Calibri"/>
+              </a:rPr>
+              <a:t>, then </a:t>
+            </a:r>
+            <a:r>
+              <a:rPr sz="2050" b="0">
+                <a:solidFill>
+                  <a:srgbClr val="067D17"/>
+                </a:solidFill>
+                <a:latin typeface="JetBrains Mono"/>
+                <a:ea typeface="JetBrains Mono"/>
+                <a:cs typeface="JetBrains Mono"/>
+              </a:rPr>
+              <a:t>"Too high"</a:t>
+            </a:r>
+            <a:r>
+              <a:rPr sz="2400" b="0">
+                <a:solidFill>
+                  <a:srgbClr val="080808"/>
+                </a:solidFill>
+                <a:latin typeface="Calibri"/>
+                <a:ea typeface="Calibri"/>
+                <a:cs typeface="Calibri"/>
+              </a:rPr>
+              <a:t>.</a:t>
             </a:r>
           </a:p>
         </p:txBody>
@@ -8940,7 +9078,7 @@
         </p:spPr>
         <p:txBody>
           <a:bodyPr xmlns:a="http://schemas.openxmlformats.org/drawingml/2006/main">
-            <a:normAutofit fontScale="92683"/>
+            <a:normAutofit fontScale="100000"/>
           </a:bodyPr>
           <a:lstStyle xmlns:a="http://schemas.openxmlformats.org/drawingml/2006/main"/>
           <a:p xmlns:a="http://schemas.openxmlformats.org/drawingml/2006/main">
@@ -8959,10 +9097,10 @@
                 <a:ea typeface="Calibri"/>
                 <a:cs typeface="Calibri"/>
               </a:rPr>
-              <a:t>Store </a:t>
-            </a:r>
-            <a:r>
-              <a:rPr sz="2400" b="0">
+              <a:t>Create a door-code checker. Store </a:t>
+            </a:r>
+            <a:r>
+              <a:rPr sz="2050" b="0">
                 <a:solidFill>
                   <a:srgbClr val="067D17"/>
                 </a:solidFill>
@@ -8981,18 +9119,21 @@
                 <a:ea typeface="Calibri"/>
                 <a:cs typeface="Calibri"/>
               </a:rPr>
-              <a:t> in [password]. Use a </a:t>
-            </a:r>
-            <a:r>
-              <a:rPr sz="2400" b="0">
-                <a:solidFill>
-                  <a:srgbClr val="1750EB"/>
-                </a:solidFill>
-                <a:latin typeface="JetBrains Mono"/>
-                <a:ea typeface="JetBrains Mono"/>
-                <a:cs typeface="JetBrains Mono"/>
-              </a:rPr>
-              <a:t>while</a:t>
+              <a:t> in </a:t>
+            </a:r>
+            <a:r>
+              <a:rPr sz="2050" b="0">
+                <a:solidFill>
+                  <a:srgbClr val="6A1B9A"/>
+                </a:solidFill>
+                <a:highlight>
+                  <a:srgbClr val="ECEAF4"/>
+                </a:highlight>
+                <a:latin typeface="JetBrains Mono"/>
+                <a:ea typeface="JetBrains Mono"/>
+                <a:cs typeface="JetBrains Mono"/>
+              </a:rPr>
+              <a:t> password </a:t>
             </a:r>
             <a:r>
               <a:rPr sz="2400" b="0">
@@ -9003,18 +9144,18 @@
                 <a:ea typeface="Calibri"/>
                 <a:cs typeface="Calibri"/>
               </a:rPr>
-              <a:t> loop to ask for a door code until the user enters </a:t>
-            </a:r>
-            <a:r>
-              <a:rPr sz="2400" b="0">
-                <a:solidFill>
-                  <a:srgbClr val="067D17"/>
-                </a:solidFill>
-                <a:latin typeface="JetBrains Mono"/>
-                <a:ea typeface="JetBrains Mono"/>
-                <a:cs typeface="JetBrains Mono"/>
-              </a:rPr>
-              <a:t>"open"</a:t>
+              <a:t>. Use a </a:t>
+            </a:r>
+            <a:r>
+              <a:rPr sz="2050" b="0">
+                <a:solidFill>
+                  <a:srgbClr val="1750EB"/>
+                </a:solidFill>
+                <a:latin typeface="JetBrains Mono"/>
+                <a:ea typeface="JetBrains Mono"/>
+                <a:cs typeface="JetBrains Mono"/>
+              </a:rPr>
+              <a:t>while</a:t>
             </a:r>
             <a:r>
               <a:rPr sz="2400" b="0">
@@ -9025,10 +9166,10 @@
                 <a:ea typeface="Calibri"/>
                 <a:cs typeface="Calibri"/>
               </a:rPr>
-              <a:t> or [attempts] reaches 3. Add 1 to [attempts] after each answer. Test </a:t>
-            </a:r>
-            <a:r>
-              <a:rPr sz="2400" b="0">
+              <a:t> loop to ask for a code until it is correct or three attempts are used. Display </a:t>
+            </a:r>
+            <a:r>
+              <a:rPr sz="2050" b="0">
                 <a:solidFill>
                   <a:srgbClr val="067D17"/>
                 </a:solidFill>
@@ -9036,7 +9177,7 @@
                 <a:ea typeface="JetBrains Mono"/>
                 <a:cs typeface="JetBrains Mono"/>
               </a:rPr>
-              <a:t>"open"</a:t>
+              <a:t>"Door opened."</a:t>
             </a:r>
             <a:r>
               <a:rPr sz="2400" b="0">
@@ -9047,10 +9188,10 @@
                 <a:ea typeface="Calibri"/>
                 <a:cs typeface="Calibri"/>
               </a:rPr>
-              <a:t>; display </a:t>
-            </a:r>
-            <a:r>
-              <a:rPr sz="2400" b="0">
+              <a:t> or </a:t>
+            </a:r>
+            <a:r>
+              <a:rPr sz="2050" b="0">
                 <a:solidFill>
                   <a:srgbClr val="067D17"/>
                 </a:solidFill>
@@ -9058,7 +9199,7 @@
                 <a:ea typeface="JetBrains Mono"/>
                 <a:cs typeface="JetBrains Mono"/>
               </a:rPr>
-              <a:t>"Door opened. Attempts used: 1"</a:t>
+              <a:t>"Door locked."</a:t>
             </a:r>
             <a:r>
               <a:rPr sz="2400" b="0">
@@ -9069,10 +9210,10 @@
                 <a:ea typeface="Calibri"/>
                 <a:cs typeface="Calibri"/>
               </a:rPr>
-              <a:t>. Test </a:t>
-            </a:r>
-            <a:r>
-              <a:rPr sz="2400" b="0">
+              <a:t> followed by the attempts used. For example, </a:t>
+            </a:r>
+            <a:r>
+              <a:rPr sz="2050" b="0">
                 <a:solidFill>
                   <a:srgbClr val="067D17"/>
                 </a:solidFill>
@@ -9094,7 +9235,7 @@
               <a:t>, </a:t>
             </a:r>
             <a:r>
-              <a:rPr sz="2400" b="0">
+              <a:rPr sz="2050" b="0">
                 <a:solidFill>
                   <a:srgbClr val="067D17"/>
                 </a:solidFill>
@@ -9116,7 +9257,7 @@
               <a:t> and </a:t>
             </a:r>
             <a:r>
-              <a:rPr sz="2400" b="0">
+              <a:rPr sz="2050" b="0">
                 <a:solidFill>
                   <a:srgbClr val="067D17"/>
                 </a:solidFill>
@@ -9135,10 +9276,10 @@
                 <a:ea typeface="Calibri"/>
                 <a:cs typeface="Calibri"/>
               </a:rPr>
-              <a:t>; display </a:t>
-            </a:r>
-            <a:r>
-              <a:rPr sz="2400" b="0">
+              <a:t> display </a:t>
+            </a:r>
+            <a:r>
+              <a:rPr sz="2050" b="0">
                 <a:solidFill>
                   <a:srgbClr val="067D17"/>
                 </a:solidFill>

--- a/Mapped Curriculum Lessons/Grade 6/Lesson 09 - Condition Loops/Condition Loops - Slides.pptx
+++ b/Mapped Curriculum Lessons/Grade 6/Lesson 09 - Condition Loops/Condition Loops - Slides.pptx
@@ -2,28 +2,28 @@
 <file path=ppt/presentation.xml><?xml version="1.0" encoding="utf-8"?>
 <p:presentation xmlns:p="http://schemas.openxmlformats.org/presentationml/2006/main" embedTrueTypeFonts="1" saveSubsetFonts="0">
   <p:sldMasterIdLst>
-    <p:sldMasterId xmlns:r="http://schemas.openxmlformats.org/officeDocument/2006/relationships" id="2147483648" r:id="Re243026a39e744d8"/>
+    <p:sldMasterId xmlns:r="http://schemas.openxmlformats.org/officeDocument/2006/relationships" id="2147483648" r:id="R66ea8d58f3a34019"/>
   </p:sldMasterIdLst>
   <p:notesMasterIdLst>
-    <p:notesMasterId xmlns:r="http://schemas.openxmlformats.org/officeDocument/2006/relationships" r:id="R9af62b6119434a73"/>
+    <p:notesMasterId xmlns:r="http://schemas.openxmlformats.org/officeDocument/2006/relationships" r:id="R94e191d5215b476e"/>
   </p:notesMasterIdLst>
   <p:sldIdLst>
-    <p:sldId xmlns:r="http://schemas.openxmlformats.org/officeDocument/2006/relationships" id="256" r:id="Rba1a77db66df4708"/>
-    <p:sldId xmlns:r="http://schemas.openxmlformats.org/officeDocument/2006/relationships" id="257" r:id="Re9d209c07083458e"/>
-    <p:sldId xmlns:r="http://schemas.openxmlformats.org/officeDocument/2006/relationships" id="258" r:id="R1a0541d933e644e2"/>
-    <p:sldId xmlns:r="http://schemas.openxmlformats.org/officeDocument/2006/relationships" id="259" r:id="Rfbabc51da10042fb"/>
-    <p:sldId xmlns:r="http://schemas.openxmlformats.org/officeDocument/2006/relationships" id="260" r:id="Rdaa90c58f83342a7"/>
-    <p:sldId xmlns:r="http://schemas.openxmlformats.org/officeDocument/2006/relationships" id="261" r:id="R7a814aa3ae184eb1"/>
-    <p:sldId xmlns:r="http://schemas.openxmlformats.org/officeDocument/2006/relationships" id="262" r:id="Rc0e69b9c78ec4d26"/>
-    <p:sldId xmlns:r="http://schemas.openxmlformats.org/officeDocument/2006/relationships" id="263" r:id="R0d673d096d6c4916"/>
-    <p:sldId xmlns:r="http://schemas.openxmlformats.org/officeDocument/2006/relationships" id="264" r:id="Ra51f3f5b08dd443a"/>
+    <p:sldId xmlns:r="http://schemas.openxmlformats.org/officeDocument/2006/relationships" id="256" r:id="R843ba6b0101c4fde"/>
+    <p:sldId xmlns:r="http://schemas.openxmlformats.org/officeDocument/2006/relationships" id="257" r:id="Rf571f55f36cf4829"/>
+    <p:sldId xmlns:r="http://schemas.openxmlformats.org/officeDocument/2006/relationships" id="258" r:id="R05962cbd485d48fc"/>
+    <p:sldId xmlns:r="http://schemas.openxmlformats.org/officeDocument/2006/relationships" id="259" r:id="R9fee1265e040427f"/>
+    <p:sldId xmlns:r="http://schemas.openxmlformats.org/officeDocument/2006/relationships" id="260" r:id="R2853f20f8f3540db"/>
+    <p:sldId xmlns:r="http://schemas.openxmlformats.org/officeDocument/2006/relationships" id="261" r:id="Reed8ed4293ce43da"/>
+    <p:sldId xmlns:r="http://schemas.openxmlformats.org/officeDocument/2006/relationships" id="262" r:id="Rf71a110a50874bbf"/>
+    <p:sldId xmlns:r="http://schemas.openxmlformats.org/officeDocument/2006/relationships" id="263" r:id="R2fcd15234a1840ba"/>
+    <p:sldId xmlns:r="http://schemas.openxmlformats.org/officeDocument/2006/relationships" id="264" r:id="R72703660054c4ccd"/>
   </p:sldIdLst>
   <p:sldSz cx="12192000" cy="6858000"/>
   <p:notesSz cx="6858000" cy="9144000"/>
   <p:embeddedFontLst>
     <p:embeddedFont>
       <p:font typeface="JetBrains Mono"/>
-      <p:regular xmlns:r="http://schemas.openxmlformats.org/officeDocument/2006/relationships" r:id="R0b177af8f3c74ca4"/>
+      <p:regular xmlns:r="http://schemas.openxmlformats.org/officeDocument/2006/relationships" r:id="R37bbb1587f1445be"/>
     </p:embeddedFont>
   </p:embeddedFontLst>
 </p:presentation>
@@ -1071,7 +1071,7 @@
           <p:nvPr/>
         </p:nvPicPr>
         <p:blipFill rotWithShape="1">
-          <a:blip xmlns:r="http://schemas.openxmlformats.org/officeDocument/2006/relationships" xmlns:a="http://schemas.openxmlformats.org/drawingml/2006/main" r:embed="R3167ac073a3845f9"/>
+          <a:blip xmlns:r="http://schemas.openxmlformats.org/officeDocument/2006/relationships" xmlns:a="http://schemas.openxmlformats.org/drawingml/2006/main" r:embed="R5d7b921722bb41fc"/>
           <a:stretch xmlns:a="http://schemas.openxmlformats.org/drawingml/2006/main"/>
         </p:blipFill>
         <p:spPr>
@@ -1451,7 +1451,7 @@
           <p:nvPr/>
         </p:nvPicPr>
         <p:blipFill rotWithShape="1">
-          <a:blip xmlns:r="http://schemas.openxmlformats.org/officeDocument/2006/relationships" xmlns:a="http://schemas.openxmlformats.org/drawingml/2006/main" r:embed="Rdb9bed8a26cf41df">
+          <a:blip xmlns:r="http://schemas.openxmlformats.org/officeDocument/2006/relationships" xmlns:a="http://schemas.openxmlformats.org/drawingml/2006/main" r:embed="R65b72657a2404cc6">
             <a:alphaModFix amt="28000"/>
           </a:blip>
           <a:stretch xmlns:a="http://schemas.openxmlformats.org/drawingml/2006/main"/>
@@ -1664,7 +1664,7 @@
           <p:nvPr/>
         </p:nvPicPr>
         <p:blipFill rotWithShape="1">
-          <a:blip xmlns:r="http://schemas.openxmlformats.org/officeDocument/2006/relationships" xmlns:a="http://schemas.openxmlformats.org/drawingml/2006/main" r:embed="R77bd9222fff643f0">
+          <a:blip xmlns:r="http://schemas.openxmlformats.org/officeDocument/2006/relationships" xmlns:a="http://schemas.openxmlformats.org/drawingml/2006/main" r:embed="R75ad7ff766d14cd2">
             <a:alphaModFix amt="28000"/>
           </a:blip>
           <a:stretch xmlns:a="http://schemas.openxmlformats.org/drawingml/2006/main"/>
@@ -1899,7 +1899,7 @@
           <p:nvPr/>
         </p:nvPicPr>
         <p:blipFill rotWithShape="1">
-          <a:blip xmlns:r="http://schemas.openxmlformats.org/officeDocument/2006/relationships" xmlns:a="http://schemas.openxmlformats.org/drawingml/2006/main" r:embed="R39b9d7f9dedc4a5d">
+          <a:blip xmlns:r="http://schemas.openxmlformats.org/officeDocument/2006/relationships" xmlns:a="http://schemas.openxmlformats.org/drawingml/2006/main" r:embed="R9e998021e8754c19">
             <a:alphaModFix amt="28000"/>
           </a:blip>
           <a:stretch xmlns:a="http://schemas.openxmlformats.org/drawingml/2006/main"/>
@@ -2176,7 +2176,7 @@
           <p:nvPr/>
         </p:nvPicPr>
         <p:blipFill rotWithShape="1">
-          <a:blip xmlns:r="http://schemas.openxmlformats.org/officeDocument/2006/relationships" xmlns:a="http://schemas.openxmlformats.org/drawingml/2006/main" r:embed="Re2a3961b93f34e5e">
+          <a:blip xmlns:r="http://schemas.openxmlformats.org/officeDocument/2006/relationships" xmlns:a="http://schemas.openxmlformats.org/drawingml/2006/main" r:embed="R0309e4846e374888">
             <a:alphaModFix amt="28000"/>
           </a:blip>
           <a:stretch xmlns:a="http://schemas.openxmlformats.org/drawingml/2006/main"/>
@@ -2451,7 +2451,7 @@
           <p:nvPr/>
         </p:nvPicPr>
         <p:blipFill rotWithShape="1">
-          <a:blip xmlns:r="http://schemas.openxmlformats.org/officeDocument/2006/relationships" xmlns:a="http://schemas.openxmlformats.org/drawingml/2006/main" r:embed="Ra25d8cba69ec44b6">
+          <a:blip xmlns:r="http://schemas.openxmlformats.org/officeDocument/2006/relationships" xmlns:a="http://schemas.openxmlformats.org/drawingml/2006/main" r:embed="Re74d005cce154e57">
             <a:alphaModFix amt="28000"/>
           </a:blip>
           <a:stretch xmlns:a="http://schemas.openxmlformats.org/drawingml/2006/main"/>
@@ -2875,7 +2875,7 @@
           <p:nvPr/>
         </p:nvPicPr>
         <p:blipFill rotWithShape="1">
-          <a:blip xmlns:r="http://schemas.openxmlformats.org/officeDocument/2006/relationships" xmlns:a="http://schemas.openxmlformats.org/drawingml/2006/main" r:embed="R53fb17f159554c12">
+          <a:blip xmlns:r="http://schemas.openxmlformats.org/officeDocument/2006/relationships" xmlns:a="http://schemas.openxmlformats.org/drawingml/2006/main" r:embed="R08e2a97fc2a044ea">
             <a:alphaModFix amt="28000"/>
           </a:blip>
           <a:stretch xmlns:a="http://schemas.openxmlformats.org/drawingml/2006/main"/>
@@ -3016,7 +3016,7 @@
           <p:nvPr/>
         </p:nvPicPr>
         <p:blipFill rotWithShape="1">
-          <a:blip xmlns:r="http://schemas.openxmlformats.org/officeDocument/2006/relationships" xmlns:a="http://schemas.openxmlformats.org/drawingml/2006/main" r:embed="R730aa03ca7fd4ff1">
+          <a:blip xmlns:r="http://schemas.openxmlformats.org/officeDocument/2006/relationships" xmlns:a="http://schemas.openxmlformats.org/drawingml/2006/main" r:embed="R1e3edac2cda140a5">
             <a:alphaModFix amt="28000"/>
           </a:blip>
           <a:stretch xmlns:a="http://schemas.openxmlformats.org/drawingml/2006/main"/>
@@ -3130,7 +3130,7 @@
           <p:nvPr/>
         </p:nvPicPr>
         <p:blipFill rotWithShape="1">
-          <a:blip xmlns:r="http://schemas.openxmlformats.org/officeDocument/2006/relationships" xmlns:a="http://schemas.openxmlformats.org/drawingml/2006/main" r:embed="R2c8c32732a1e44eb">
+          <a:blip xmlns:r="http://schemas.openxmlformats.org/officeDocument/2006/relationships" xmlns:a="http://schemas.openxmlformats.org/drawingml/2006/main" r:embed="R965900aee4b64857">
             <a:alphaModFix amt="28000"/>
           </a:blip>
           <a:stretch xmlns:a="http://schemas.openxmlformats.org/drawingml/2006/main"/>
@@ -3457,7 +3457,7 @@
           <p:nvPr/>
         </p:nvPicPr>
         <p:blipFill rotWithShape="1">
-          <a:blip xmlns:r="http://schemas.openxmlformats.org/officeDocument/2006/relationships" xmlns:a="http://schemas.openxmlformats.org/drawingml/2006/main" r:embed="R9455138d60054a65">
+          <a:blip xmlns:r="http://schemas.openxmlformats.org/officeDocument/2006/relationships" xmlns:a="http://schemas.openxmlformats.org/drawingml/2006/main" r:embed="R759870f509724fa5">
             <a:alphaModFix amt="28000"/>
           </a:blip>
           <a:stretch xmlns:a="http://schemas.openxmlformats.org/drawingml/2006/main"/>
@@ -3745,7 +3745,7 @@
           <p:nvPr/>
         </p:nvPicPr>
         <p:blipFill rotWithShape="1">
-          <a:blip xmlns:r="http://schemas.openxmlformats.org/officeDocument/2006/relationships" xmlns:a="http://schemas.openxmlformats.org/drawingml/2006/main" r:embed="Ra978dee07e084e5b">
+          <a:blip xmlns:r="http://schemas.openxmlformats.org/officeDocument/2006/relationships" xmlns:a="http://schemas.openxmlformats.org/drawingml/2006/main" r:embed="R57e7e171285044ab">
             <a:alphaModFix amt="28000"/>
           </a:blip>
           <a:stretch xmlns:a="http://schemas.openxmlformats.org/drawingml/2006/main"/>
@@ -3982,17 +3982,17 @@
   </p:cSld>
   <p:clrMap bg1="lt1" tx1="dk1" bg2="lt2" tx2="dk2" accent1="accent1" accent2="accent2" accent3="accent3" accent4="accent4" accent5="accent5" accent6="accent6" hlink="hlink" folHlink="folHlink"/>
   <p:sldLayoutIdLst>
-    <p:sldLayoutId xmlns:r="http://schemas.openxmlformats.org/officeDocument/2006/relationships" id="2147483649" r:id="R1a7d4bd9ad2f4585"/>
-    <p:sldLayoutId xmlns:r="http://schemas.openxmlformats.org/officeDocument/2006/relationships" id="2147483650" r:id="Re5409db6fd91481b"/>
-    <p:sldLayoutId xmlns:r="http://schemas.openxmlformats.org/officeDocument/2006/relationships" id="2147483651" r:id="Rcb2db27a0b3f44c2"/>
-    <p:sldLayoutId xmlns:r="http://schemas.openxmlformats.org/officeDocument/2006/relationships" id="2147483652" r:id="R070c979a13004f09"/>
-    <p:sldLayoutId xmlns:r="http://schemas.openxmlformats.org/officeDocument/2006/relationships" id="2147483653" r:id="Re419f09ee1464b2a"/>
-    <p:sldLayoutId xmlns:r="http://schemas.openxmlformats.org/officeDocument/2006/relationships" id="2147483654" r:id="R83bdcf49c5c84feb"/>
-    <p:sldLayoutId xmlns:r="http://schemas.openxmlformats.org/officeDocument/2006/relationships" id="2147483655" r:id="R372adc4662684cf8"/>
-    <p:sldLayoutId xmlns:r="http://schemas.openxmlformats.org/officeDocument/2006/relationships" id="2147483656" r:id="Ref3c897167d144fb"/>
-    <p:sldLayoutId xmlns:r="http://schemas.openxmlformats.org/officeDocument/2006/relationships" id="2147483657" r:id="Ra4d48853d5134fe7"/>
-    <p:sldLayoutId xmlns:r="http://schemas.openxmlformats.org/officeDocument/2006/relationships" id="2147483658" r:id="R4eb65545e2a14377"/>
-    <p:sldLayoutId xmlns:r="http://schemas.openxmlformats.org/officeDocument/2006/relationships" id="2147483659" r:id="R450c36776af048df"/>
+    <p:sldLayoutId xmlns:r="http://schemas.openxmlformats.org/officeDocument/2006/relationships" id="2147483649" r:id="Re691d24dd1d749bb"/>
+    <p:sldLayoutId xmlns:r="http://schemas.openxmlformats.org/officeDocument/2006/relationships" id="2147483650" r:id="R46450e7bfc5b43e3"/>
+    <p:sldLayoutId xmlns:r="http://schemas.openxmlformats.org/officeDocument/2006/relationships" id="2147483651" r:id="Re2f48e60c1d64727"/>
+    <p:sldLayoutId xmlns:r="http://schemas.openxmlformats.org/officeDocument/2006/relationships" id="2147483652" r:id="R3466500c986140e5"/>
+    <p:sldLayoutId xmlns:r="http://schemas.openxmlformats.org/officeDocument/2006/relationships" id="2147483653" r:id="Rf8961c9a68cb45ca"/>
+    <p:sldLayoutId xmlns:r="http://schemas.openxmlformats.org/officeDocument/2006/relationships" id="2147483654" r:id="R3c05aaf9894140d5"/>
+    <p:sldLayoutId xmlns:r="http://schemas.openxmlformats.org/officeDocument/2006/relationships" id="2147483655" r:id="R6a3ad36b7d8c46f3"/>
+    <p:sldLayoutId xmlns:r="http://schemas.openxmlformats.org/officeDocument/2006/relationships" id="2147483656" r:id="R5a40b67d04794af7"/>
+    <p:sldLayoutId xmlns:r="http://schemas.openxmlformats.org/officeDocument/2006/relationships" id="2147483657" r:id="R959cd011e0174b0f"/>
+    <p:sldLayoutId xmlns:r="http://schemas.openxmlformats.org/officeDocument/2006/relationships" id="2147483658" r:id="R7c3a1d7674b743f4"/>
+    <p:sldLayoutId xmlns:r="http://schemas.openxmlformats.org/officeDocument/2006/relationships" id="2147483659" r:id="Rfb89f2ec8ff74c6a"/>
   </p:sldLayoutIdLst>
   <p:hf hdr="0" ftr="0" dt="0"/>
   <p:txStyles>
@@ -4955,7 +4955,7 @@
             <a:r>
               <a:rPr sz="2400">
                 <a:solidFill>
-                  <a:srgbClr val="1750EB"/>
+                  <a:srgbClr val="C45E00"/>
                 </a:solidFill>
                 <a:latin typeface="JetBrains Mono"/>
                 <a:ea typeface="JetBrains Mono"/>
@@ -4999,7 +4999,7 @@
             <a:r>
               <a:rPr sz="2400">
                 <a:solidFill>
-                  <a:srgbClr val="1750EB"/>
+                  <a:srgbClr val="C45E00"/>
                 </a:solidFill>
                 <a:latin typeface="JetBrains Mono"/>
                 <a:ea typeface="JetBrains Mono"/>
@@ -5563,7 +5563,7 @@
             <a:r>
               <a:rPr sz="2400">
                 <a:solidFill>
-                  <a:srgbClr val="1750EB"/>
+                  <a:srgbClr val="C45E00"/>
                 </a:solidFill>
                 <a:latin typeface="JetBrains Mono"/>
                 <a:ea typeface="JetBrains Mono"/>
@@ -5607,7 +5607,7 @@
             <a:r>
               <a:rPr sz="2400">
                 <a:solidFill>
-                  <a:srgbClr val="1750EB"/>
+                  <a:srgbClr val="C45E00"/>
                 </a:solidFill>
                 <a:latin typeface="JetBrains Mono"/>
                 <a:ea typeface="JetBrains Mono"/>
@@ -6171,7 +6171,7 @@
             <a:r>
               <a:rPr sz="2400">
                 <a:solidFill>
-                  <a:srgbClr val="1750EB"/>
+                  <a:srgbClr val="C45E00"/>
                 </a:solidFill>
                 <a:latin typeface="JetBrains Mono"/>
                 <a:ea typeface="JetBrains Mono"/>
@@ -6215,7 +6215,7 @@
             <a:r>
               <a:rPr sz="2400">
                 <a:solidFill>
-                  <a:srgbClr val="1750EB"/>
+                  <a:srgbClr val="C45E00"/>
                 </a:solidFill>
                 <a:latin typeface="JetBrains Mono"/>
                 <a:ea typeface="JetBrains Mono"/>
@@ -7036,7 +7036,7 @@
             <a:r>
               <a:rPr sz="1400">
                 <a:solidFill>
-                  <a:srgbClr val="1750EB"/>
+                  <a:srgbClr val="C45E00"/>
                 </a:solidFill>
                 <a:latin typeface="JetBrains Mono"/>
                 <a:ea typeface="JetBrains Mono"/>
@@ -7080,7 +7080,7 @@
             <a:r>
               <a:rPr sz="1400">
                 <a:solidFill>
-                  <a:srgbClr val="1750EB"/>
+                  <a:srgbClr val="C45E00"/>
                 </a:solidFill>
                 <a:latin typeface="JetBrains Mono"/>
                 <a:ea typeface="JetBrains Mono"/>
@@ -7412,7 +7412,7 @@
             <a:r>
               <a:rPr sz="2050" b="0">
                 <a:solidFill>
-                  <a:srgbClr val="1750EB"/>
+                  <a:srgbClr val="C45E00"/>
                 </a:solidFill>
                 <a:latin typeface="JetBrains Mono"/>
                 <a:ea typeface="JetBrains Mono"/>
@@ -7862,7 +7862,7 @@
             <a:r>
               <a:rPr sz="1400">
                 <a:solidFill>
-                  <a:srgbClr val="1750EB"/>
+                  <a:srgbClr val="C45E00"/>
                 </a:solidFill>
                 <a:latin typeface="JetBrains Mono"/>
                 <a:ea typeface="JetBrains Mono"/>
@@ -7906,7 +7906,7 @@
             <a:r>
               <a:rPr sz="1400">
                 <a:solidFill>
-                  <a:srgbClr val="1750EB"/>
+                  <a:srgbClr val="C45E00"/>
                 </a:solidFill>
                 <a:latin typeface="JetBrains Mono"/>
                 <a:ea typeface="JetBrains Mono"/>
@@ -8238,7 +8238,7 @@
             <a:r>
               <a:rPr sz="2050" b="0">
                 <a:solidFill>
-                  <a:srgbClr val="1750EB"/>
+                  <a:srgbClr val="C45E00"/>
                 </a:solidFill>
                 <a:latin typeface="JetBrains Mono"/>
                 <a:ea typeface="JetBrains Mono"/>
@@ -8260,7 +8260,7 @@
             <a:r>
               <a:rPr sz="2050" b="0">
                 <a:solidFill>
-                  <a:srgbClr val="1750EB"/>
+                  <a:srgbClr val="C45E00"/>
                 </a:solidFill>
                 <a:latin typeface="JetBrains Mono"/>
                 <a:ea typeface="JetBrains Mono"/>
@@ -8282,7 +8282,7 @@
             <a:r>
               <a:rPr sz="2050" b="0">
                 <a:solidFill>
-                  <a:srgbClr val="1750EB"/>
+                  <a:srgbClr val="C45E00"/>
                 </a:solidFill>
                 <a:latin typeface="JetBrains Mono"/>
                 <a:ea typeface="JetBrains Mono"/>
@@ -8726,7 +8726,7 @@
             <a:r>
               <a:rPr sz="1400">
                 <a:solidFill>
-                  <a:srgbClr val="1750EB"/>
+                  <a:srgbClr val="C45E00"/>
                 </a:solidFill>
                 <a:latin typeface="JetBrains Mono"/>
                 <a:ea typeface="JetBrains Mono"/>
@@ -8770,7 +8770,7 @@
             <a:r>
               <a:rPr sz="1400">
                 <a:solidFill>
-                  <a:srgbClr val="1750EB"/>
+                  <a:srgbClr val="C45E00"/>
                 </a:solidFill>
                 <a:latin typeface="JetBrains Mono"/>
                 <a:ea typeface="JetBrains Mono"/>
@@ -9149,7 +9149,7 @@
             <a:r>
               <a:rPr sz="2050" b="0">
                 <a:solidFill>
-                  <a:srgbClr val="1750EB"/>
+                  <a:srgbClr val="C45E00"/>
                 </a:solidFill>
                 <a:latin typeface="JetBrains Mono"/>
                 <a:ea typeface="JetBrains Mono"/>
@@ -9637,7 +9637,7 @@
             <a:r>
               <a:rPr sz="1400">
                 <a:solidFill>
-                  <a:srgbClr val="1750EB"/>
+                  <a:srgbClr val="C45E00"/>
                 </a:solidFill>
                 <a:latin typeface="JetBrains Mono"/>
                 <a:ea typeface="JetBrains Mono"/>
@@ -9681,7 +9681,7 @@
             <a:r>
               <a:rPr sz="1400">
                 <a:solidFill>
-                  <a:srgbClr val="1750EB"/>
+                  <a:srgbClr val="C45E00"/>
                 </a:solidFill>
                 <a:latin typeface="JetBrains Mono"/>
                 <a:ea typeface="JetBrains Mono"/>
@@ -10099,7 +10099,7 @@
             <a:r>
               <a:rPr sz="1800">
                 <a:solidFill>
-                  <a:srgbClr val="1750EB"/>
+                  <a:srgbClr val="C45E00"/>
                 </a:solidFill>
                 <a:latin typeface="JetBrains Mono"/>
                 <a:ea typeface="JetBrains Mono"/>
@@ -10143,7 +10143,7 @@
             <a:r>
               <a:rPr sz="1800">
                 <a:solidFill>
-                  <a:srgbClr val="1750EB"/>
+                  <a:srgbClr val="C45E00"/>
                 </a:solidFill>
                 <a:latin typeface="JetBrains Mono"/>
                 <a:ea typeface="JetBrains Mono"/>

--- a/Mapped Curriculum Lessons/Grade 6/Lesson 09 - Condition Loops/Condition Loops - Slides.pptx
+++ b/Mapped Curriculum Lessons/Grade 6/Lesson 09 - Condition Loops/Condition Loops - Slides.pptx
@@ -2,28 +2,28 @@
 <file path=ppt/presentation.xml><?xml version="1.0" encoding="utf-8"?>
 <p:presentation xmlns:p="http://schemas.openxmlformats.org/presentationml/2006/main" embedTrueTypeFonts="1" saveSubsetFonts="0">
   <p:sldMasterIdLst>
-    <p:sldMasterId xmlns:r="http://schemas.openxmlformats.org/officeDocument/2006/relationships" id="2147483648" r:id="R66ea8d58f3a34019"/>
+    <p:sldMasterId xmlns:r="http://schemas.openxmlformats.org/officeDocument/2006/relationships" id="2147483648" r:id="Ra8f46a84e8114b22"/>
   </p:sldMasterIdLst>
   <p:notesMasterIdLst>
-    <p:notesMasterId xmlns:r="http://schemas.openxmlformats.org/officeDocument/2006/relationships" r:id="R94e191d5215b476e"/>
+    <p:notesMasterId xmlns:r="http://schemas.openxmlformats.org/officeDocument/2006/relationships" r:id="Rf19c2fed98ab4b3e"/>
   </p:notesMasterIdLst>
   <p:sldIdLst>
-    <p:sldId xmlns:r="http://schemas.openxmlformats.org/officeDocument/2006/relationships" id="256" r:id="R843ba6b0101c4fde"/>
-    <p:sldId xmlns:r="http://schemas.openxmlformats.org/officeDocument/2006/relationships" id="257" r:id="Rf571f55f36cf4829"/>
-    <p:sldId xmlns:r="http://schemas.openxmlformats.org/officeDocument/2006/relationships" id="258" r:id="R05962cbd485d48fc"/>
-    <p:sldId xmlns:r="http://schemas.openxmlformats.org/officeDocument/2006/relationships" id="259" r:id="R9fee1265e040427f"/>
-    <p:sldId xmlns:r="http://schemas.openxmlformats.org/officeDocument/2006/relationships" id="260" r:id="R2853f20f8f3540db"/>
-    <p:sldId xmlns:r="http://schemas.openxmlformats.org/officeDocument/2006/relationships" id="261" r:id="Reed8ed4293ce43da"/>
-    <p:sldId xmlns:r="http://schemas.openxmlformats.org/officeDocument/2006/relationships" id="262" r:id="Rf71a110a50874bbf"/>
-    <p:sldId xmlns:r="http://schemas.openxmlformats.org/officeDocument/2006/relationships" id="263" r:id="R2fcd15234a1840ba"/>
-    <p:sldId xmlns:r="http://schemas.openxmlformats.org/officeDocument/2006/relationships" id="264" r:id="R72703660054c4ccd"/>
+    <p:sldId xmlns:r="http://schemas.openxmlformats.org/officeDocument/2006/relationships" id="256" r:id="R4921b7a0848e4ba3"/>
+    <p:sldId xmlns:r="http://schemas.openxmlformats.org/officeDocument/2006/relationships" id="257" r:id="R30b8ea47c3164cd0"/>
+    <p:sldId xmlns:r="http://schemas.openxmlformats.org/officeDocument/2006/relationships" id="258" r:id="Rd9fc3a13bc12442c"/>
+    <p:sldId xmlns:r="http://schemas.openxmlformats.org/officeDocument/2006/relationships" id="259" r:id="Rab2ede6ee6884d50"/>
+    <p:sldId xmlns:r="http://schemas.openxmlformats.org/officeDocument/2006/relationships" id="260" r:id="R4d4de09bc7a14f5a"/>
+    <p:sldId xmlns:r="http://schemas.openxmlformats.org/officeDocument/2006/relationships" id="261" r:id="R6ead61f9f4b146bd"/>
+    <p:sldId xmlns:r="http://schemas.openxmlformats.org/officeDocument/2006/relationships" id="262" r:id="R63b3b7affaf04958"/>
+    <p:sldId xmlns:r="http://schemas.openxmlformats.org/officeDocument/2006/relationships" id="263" r:id="R0b2fd366b67c4d30"/>
+    <p:sldId xmlns:r="http://schemas.openxmlformats.org/officeDocument/2006/relationships" id="264" r:id="R3f85356a374b4f44"/>
   </p:sldIdLst>
   <p:sldSz cx="12192000" cy="6858000"/>
   <p:notesSz cx="6858000" cy="9144000"/>
   <p:embeddedFontLst>
     <p:embeddedFont>
       <p:font typeface="JetBrains Mono"/>
-      <p:regular xmlns:r="http://schemas.openxmlformats.org/officeDocument/2006/relationships" r:id="R37bbb1587f1445be"/>
+      <p:regular xmlns:r="http://schemas.openxmlformats.org/officeDocument/2006/relationships" r:id="Rc5e45d7b239245d3"/>
     </p:embeddedFont>
   </p:embeddedFontLst>
 </p:presentation>
@@ -1071,7 +1071,7 @@
           <p:nvPr/>
         </p:nvPicPr>
         <p:blipFill rotWithShape="1">
-          <a:blip xmlns:r="http://schemas.openxmlformats.org/officeDocument/2006/relationships" xmlns:a="http://schemas.openxmlformats.org/drawingml/2006/main" r:embed="R5d7b921722bb41fc"/>
+          <a:blip xmlns:r="http://schemas.openxmlformats.org/officeDocument/2006/relationships" xmlns:a="http://schemas.openxmlformats.org/drawingml/2006/main" r:embed="R33e1f33c2c414c3d"/>
           <a:stretch xmlns:a="http://schemas.openxmlformats.org/drawingml/2006/main"/>
         </p:blipFill>
         <p:spPr>
@@ -1451,7 +1451,7 @@
           <p:nvPr/>
         </p:nvPicPr>
         <p:blipFill rotWithShape="1">
-          <a:blip xmlns:r="http://schemas.openxmlformats.org/officeDocument/2006/relationships" xmlns:a="http://schemas.openxmlformats.org/drawingml/2006/main" r:embed="R65b72657a2404cc6">
+          <a:blip xmlns:r="http://schemas.openxmlformats.org/officeDocument/2006/relationships" xmlns:a="http://schemas.openxmlformats.org/drawingml/2006/main" r:embed="Ra290eb3cc90c4af2">
             <a:alphaModFix amt="28000"/>
           </a:blip>
           <a:stretch xmlns:a="http://schemas.openxmlformats.org/drawingml/2006/main"/>
@@ -1664,7 +1664,7 @@
           <p:nvPr/>
         </p:nvPicPr>
         <p:blipFill rotWithShape="1">
-          <a:blip xmlns:r="http://schemas.openxmlformats.org/officeDocument/2006/relationships" xmlns:a="http://schemas.openxmlformats.org/drawingml/2006/main" r:embed="R75ad7ff766d14cd2">
+          <a:blip xmlns:r="http://schemas.openxmlformats.org/officeDocument/2006/relationships" xmlns:a="http://schemas.openxmlformats.org/drawingml/2006/main" r:embed="Rd7ea8055b20e4467">
             <a:alphaModFix amt="28000"/>
           </a:blip>
           <a:stretch xmlns:a="http://schemas.openxmlformats.org/drawingml/2006/main"/>
@@ -1899,7 +1899,7 @@
           <p:nvPr/>
         </p:nvPicPr>
         <p:blipFill rotWithShape="1">
-          <a:blip xmlns:r="http://schemas.openxmlformats.org/officeDocument/2006/relationships" xmlns:a="http://schemas.openxmlformats.org/drawingml/2006/main" r:embed="R9e998021e8754c19">
+          <a:blip xmlns:r="http://schemas.openxmlformats.org/officeDocument/2006/relationships" xmlns:a="http://schemas.openxmlformats.org/drawingml/2006/main" r:embed="R6d3dd968e1ce41b4">
             <a:alphaModFix amt="28000"/>
           </a:blip>
           <a:stretch xmlns:a="http://schemas.openxmlformats.org/drawingml/2006/main"/>
@@ -2176,7 +2176,7 @@
           <p:nvPr/>
         </p:nvPicPr>
         <p:blipFill rotWithShape="1">
-          <a:blip xmlns:r="http://schemas.openxmlformats.org/officeDocument/2006/relationships" xmlns:a="http://schemas.openxmlformats.org/drawingml/2006/main" r:embed="R0309e4846e374888">
+          <a:blip xmlns:r="http://schemas.openxmlformats.org/officeDocument/2006/relationships" xmlns:a="http://schemas.openxmlformats.org/drawingml/2006/main" r:embed="R3efa27706efd4e15">
             <a:alphaModFix amt="28000"/>
           </a:blip>
           <a:stretch xmlns:a="http://schemas.openxmlformats.org/drawingml/2006/main"/>
@@ -2451,7 +2451,7 @@
           <p:nvPr/>
         </p:nvPicPr>
         <p:blipFill rotWithShape="1">
-          <a:blip xmlns:r="http://schemas.openxmlformats.org/officeDocument/2006/relationships" xmlns:a="http://schemas.openxmlformats.org/drawingml/2006/main" r:embed="Re74d005cce154e57">
+          <a:blip xmlns:r="http://schemas.openxmlformats.org/officeDocument/2006/relationships" xmlns:a="http://schemas.openxmlformats.org/drawingml/2006/main" r:embed="R1a678d58f44b4bdb">
             <a:alphaModFix amt="28000"/>
           </a:blip>
           <a:stretch xmlns:a="http://schemas.openxmlformats.org/drawingml/2006/main"/>
@@ -2875,7 +2875,7 @@
           <p:nvPr/>
         </p:nvPicPr>
         <p:blipFill rotWithShape="1">
-          <a:blip xmlns:r="http://schemas.openxmlformats.org/officeDocument/2006/relationships" xmlns:a="http://schemas.openxmlformats.org/drawingml/2006/main" r:embed="R08e2a97fc2a044ea">
+          <a:blip xmlns:r="http://schemas.openxmlformats.org/officeDocument/2006/relationships" xmlns:a="http://schemas.openxmlformats.org/drawingml/2006/main" r:embed="R385ac46b532b4cf2">
             <a:alphaModFix amt="28000"/>
           </a:blip>
           <a:stretch xmlns:a="http://schemas.openxmlformats.org/drawingml/2006/main"/>
@@ -3016,7 +3016,7 @@
           <p:nvPr/>
         </p:nvPicPr>
         <p:blipFill rotWithShape="1">
-          <a:blip xmlns:r="http://schemas.openxmlformats.org/officeDocument/2006/relationships" xmlns:a="http://schemas.openxmlformats.org/drawingml/2006/main" r:embed="R1e3edac2cda140a5">
+          <a:blip xmlns:r="http://schemas.openxmlformats.org/officeDocument/2006/relationships" xmlns:a="http://schemas.openxmlformats.org/drawingml/2006/main" r:embed="R0ee52106f9d34328">
             <a:alphaModFix amt="28000"/>
           </a:blip>
           <a:stretch xmlns:a="http://schemas.openxmlformats.org/drawingml/2006/main"/>
@@ -3130,7 +3130,7 @@
           <p:nvPr/>
         </p:nvPicPr>
         <p:blipFill rotWithShape="1">
-          <a:blip xmlns:r="http://schemas.openxmlformats.org/officeDocument/2006/relationships" xmlns:a="http://schemas.openxmlformats.org/drawingml/2006/main" r:embed="R965900aee4b64857">
+          <a:blip xmlns:r="http://schemas.openxmlformats.org/officeDocument/2006/relationships" xmlns:a="http://schemas.openxmlformats.org/drawingml/2006/main" r:embed="Raba885602b964dde">
             <a:alphaModFix amt="28000"/>
           </a:blip>
           <a:stretch xmlns:a="http://schemas.openxmlformats.org/drawingml/2006/main"/>
@@ -3457,7 +3457,7 @@
           <p:nvPr/>
         </p:nvPicPr>
         <p:blipFill rotWithShape="1">
-          <a:blip xmlns:r="http://schemas.openxmlformats.org/officeDocument/2006/relationships" xmlns:a="http://schemas.openxmlformats.org/drawingml/2006/main" r:embed="R759870f509724fa5">
+          <a:blip xmlns:r="http://schemas.openxmlformats.org/officeDocument/2006/relationships" xmlns:a="http://schemas.openxmlformats.org/drawingml/2006/main" r:embed="R129c6650a2ca47d7">
             <a:alphaModFix amt="28000"/>
           </a:blip>
           <a:stretch xmlns:a="http://schemas.openxmlformats.org/drawingml/2006/main"/>
@@ -3745,7 +3745,7 @@
           <p:nvPr/>
         </p:nvPicPr>
         <p:blipFill rotWithShape="1">
-          <a:blip xmlns:r="http://schemas.openxmlformats.org/officeDocument/2006/relationships" xmlns:a="http://schemas.openxmlformats.org/drawingml/2006/main" r:embed="R57e7e171285044ab">
+          <a:blip xmlns:r="http://schemas.openxmlformats.org/officeDocument/2006/relationships" xmlns:a="http://schemas.openxmlformats.org/drawingml/2006/main" r:embed="R4134243021494b0e">
             <a:alphaModFix amt="28000"/>
           </a:blip>
           <a:stretch xmlns:a="http://schemas.openxmlformats.org/drawingml/2006/main"/>
@@ -3982,17 +3982,17 @@
   </p:cSld>
   <p:clrMap bg1="lt1" tx1="dk1" bg2="lt2" tx2="dk2" accent1="accent1" accent2="accent2" accent3="accent3" accent4="accent4" accent5="accent5" accent6="accent6" hlink="hlink" folHlink="folHlink"/>
   <p:sldLayoutIdLst>
-    <p:sldLayoutId xmlns:r="http://schemas.openxmlformats.org/officeDocument/2006/relationships" id="2147483649" r:id="Re691d24dd1d749bb"/>
-    <p:sldLayoutId xmlns:r="http://schemas.openxmlformats.org/officeDocument/2006/relationships" id="2147483650" r:id="R46450e7bfc5b43e3"/>
-    <p:sldLayoutId xmlns:r="http://schemas.openxmlformats.org/officeDocument/2006/relationships" id="2147483651" r:id="Re2f48e60c1d64727"/>
-    <p:sldLayoutId xmlns:r="http://schemas.openxmlformats.org/officeDocument/2006/relationships" id="2147483652" r:id="R3466500c986140e5"/>
-    <p:sldLayoutId xmlns:r="http://schemas.openxmlformats.org/officeDocument/2006/relationships" id="2147483653" r:id="Rf8961c9a68cb45ca"/>
-    <p:sldLayoutId xmlns:r="http://schemas.openxmlformats.org/officeDocument/2006/relationships" id="2147483654" r:id="R3c05aaf9894140d5"/>
-    <p:sldLayoutId xmlns:r="http://schemas.openxmlformats.org/officeDocument/2006/relationships" id="2147483655" r:id="R6a3ad36b7d8c46f3"/>
-    <p:sldLayoutId xmlns:r="http://schemas.openxmlformats.org/officeDocument/2006/relationships" id="2147483656" r:id="R5a40b67d04794af7"/>
-    <p:sldLayoutId xmlns:r="http://schemas.openxmlformats.org/officeDocument/2006/relationships" id="2147483657" r:id="R959cd011e0174b0f"/>
-    <p:sldLayoutId xmlns:r="http://schemas.openxmlformats.org/officeDocument/2006/relationships" id="2147483658" r:id="R7c3a1d7674b743f4"/>
-    <p:sldLayoutId xmlns:r="http://schemas.openxmlformats.org/officeDocument/2006/relationships" id="2147483659" r:id="Rfb89f2ec8ff74c6a"/>
+    <p:sldLayoutId xmlns:r="http://schemas.openxmlformats.org/officeDocument/2006/relationships" id="2147483649" r:id="R445c4b952ee345b3"/>
+    <p:sldLayoutId xmlns:r="http://schemas.openxmlformats.org/officeDocument/2006/relationships" id="2147483650" r:id="R976aec75e4534d02"/>
+    <p:sldLayoutId xmlns:r="http://schemas.openxmlformats.org/officeDocument/2006/relationships" id="2147483651" r:id="Rbe286c813141452c"/>
+    <p:sldLayoutId xmlns:r="http://schemas.openxmlformats.org/officeDocument/2006/relationships" id="2147483652" r:id="Rfdea138a9edc4224"/>
+    <p:sldLayoutId xmlns:r="http://schemas.openxmlformats.org/officeDocument/2006/relationships" id="2147483653" r:id="R6534f5234a4a474b"/>
+    <p:sldLayoutId xmlns:r="http://schemas.openxmlformats.org/officeDocument/2006/relationships" id="2147483654" r:id="R24f73624eadb46f0"/>
+    <p:sldLayoutId xmlns:r="http://schemas.openxmlformats.org/officeDocument/2006/relationships" id="2147483655" r:id="Rdfe9723b62934968"/>
+    <p:sldLayoutId xmlns:r="http://schemas.openxmlformats.org/officeDocument/2006/relationships" id="2147483656" r:id="R1254612fb2e44485"/>
+    <p:sldLayoutId xmlns:r="http://schemas.openxmlformats.org/officeDocument/2006/relationships" id="2147483657" r:id="Rac24c3b272b44245"/>
+    <p:sldLayoutId xmlns:r="http://schemas.openxmlformats.org/officeDocument/2006/relationships" id="2147483658" r:id="R11160a551bb04d97"/>
+    <p:sldLayoutId xmlns:r="http://schemas.openxmlformats.org/officeDocument/2006/relationships" id="2147483659" r:id="R0f571497778740b0"/>
   </p:sldLayoutIdLst>
   <p:hf hdr="0" ftr="0" dt="0"/>
   <p:txStyles>

--- a/Mapped Curriculum Lessons/Grade 6/Lesson 09 - Condition Loops/Condition Loops - Slides.pptx
+++ b/Mapped Curriculum Lessons/Grade 6/Lesson 09 - Condition Loops/Condition Loops - Slides.pptx
@@ -2,28 +2,28 @@
 <file path=ppt/presentation.xml><?xml version="1.0" encoding="utf-8"?>
 <p:presentation xmlns:p="http://schemas.openxmlformats.org/presentationml/2006/main" embedTrueTypeFonts="1" saveSubsetFonts="0">
   <p:sldMasterIdLst>
-    <p:sldMasterId xmlns:r="http://schemas.openxmlformats.org/officeDocument/2006/relationships" id="2147483648" r:id="Ra8f46a84e8114b22"/>
+    <p:sldMasterId xmlns:r="http://schemas.openxmlformats.org/officeDocument/2006/relationships" id="2147483648" r:id="R1062b02495a7443c"/>
   </p:sldMasterIdLst>
   <p:notesMasterIdLst>
-    <p:notesMasterId xmlns:r="http://schemas.openxmlformats.org/officeDocument/2006/relationships" r:id="Rf19c2fed98ab4b3e"/>
+    <p:notesMasterId xmlns:r="http://schemas.openxmlformats.org/officeDocument/2006/relationships" r:id="R09c3fcc6ed77453c"/>
   </p:notesMasterIdLst>
   <p:sldIdLst>
-    <p:sldId xmlns:r="http://schemas.openxmlformats.org/officeDocument/2006/relationships" id="256" r:id="R4921b7a0848e4ba3"/>
-    <p:sldId xmlns:r="http://schemas.openxmlformats.org/officeDocument/2006/relationships" id="257" r:id="R30b8ea47c3164cd0"/>
-    <p:sldId xmlns:r="http://schemas.openxmlformats.org/officeDocument/2006/relationships" id="258" r:id="Rd9fc3a13bc12442c"/>
-    <p:sldId xmlns:r="http://schemas.openxmlformats.org/officeDocument/2006/relationships" id="259" r:id="Rab2ede6ee6884d50"/>
-    <p:sldId xmlns:r="http://schemas.openxmlformats.org/officeDocument/2006/relationships" id="260" r:id="R4d4de09bc7a14f5a"/>
-    <p:sldId xmlns:r="http://schemas.openxmlformats.org/officeDocument/2006/relationships" id="261" r:id="R6ead61f9f4b146bd"/>
-    <p:sldId xmlns:r="http://schemas.openxmlformats.org/officeDocument/2006/relationships" id="262" r:id="R63b3b7affaf04958"/>
-    <p:sldId xmlns:r="http://schemas.openxmlformats.org/officeDocument/2006/relationships" id="263" r:id="R0b2fd366b67c4d30"/>
-    <p:sldId xmlns:r="http://schemas.openxmlformats.org/officeDocument/2006/relationships" id="264" r:id="R3f85356a374b4f44"/>
+    <p:sldId xmlns:r="http://schemas.openxmlformats.org/officeDocument/2006/relationships" id="256" r:id="Ra4915fce809342c7"/>
+    <p:sldId xmlns:r="http://schemas.openxmlformats.org/officeDocument/2006/relationships" id="257" r:id="R969e8ae863b64669"/>
+    <p:sldId xmlns:r="http://schemas.openxmlformats.org/officeDocument/2006/relationships" id="258" r:id="R22225a13b9664e53"/>
+    <p:sldId xmlns:r="http://schemas.openxmlformats.org/officeDocument/2006/relationships" id="259" r:id="R78d0c8aa00ec43fb"/>
+    <p:sldId xmlns:r="http://schemas.openxmlformats.org/officeDocument/2006/relationships" id="260" r:id="Rf18e2d8de0894696"/>
+    <p:sldId xmlns:r="http://schemas.openxmlformats.org/officeDocument/2006/relationships" id="261" r:id="R8036c67879f1461c"/>
+    <p:sldId xmlns:r="http://schemas.openxmlformats.org/officeDocument/2006/relationships" id="262" r:id="Re388b7f21d254535"/>
+    <p:sldId xmlns:r="http://schemas.openxmlformats.org/officeDocument/2006/relationships" id="263" r:id="R103670b89f1e4b9e"/>
+    <p:sldId xmlns:r="http://schemas.openxmlformats.org/officeDocument/2006/relationships" id="264" r:id="Re2a4fc1ca97f4313"/>
   </p:sldIdLst>
   <p:sldSz cx="12192000" cy="6858000"/>
   <p:notesSz cx="6858000" cy="9144000"/>
   <p:embeddedFontLst>
     <p:embeddedFont>
       <p:font typeface="JetBrains Mono"/>
-      <p:regular xmlns:r="http://schemas.openxmlformats.org/officeDocument/2006/relationships" r:id="Rc5e45d7b239245d3"/>
+      <p:regular xmlns:r="http://schemas.openxmlformats.org/officeDocument/2006/relationships" r:id="Ra0262d164e6142de"/>
     </p:embeddedFont>
   </p:embeddedFontLst>
 </p:presentation>
@@ -1071,7 +1071,7 @@
           <p:nvPr/>
         </p:nvPicPr>
         <p:blipFill rotWithShape="1">
-          <a:blip xmlns:r="http://schemas.openxmlformats.org/officeDocument/2006/relationships" xmlns:a="http://schemas.openxmlformats.org/drawingml/2006/main" r:embed="R33e1f33c2c414c3d"/>
+          <a:blip xmlns:r="http://schemas.openxmlformats.org/officeDocument/2006/relationships" xmlns:a="http://schemas.openxmlformats.org/drawingml/2006/main" r:embed="Reb55186f2af843a9"/>
           <a:stretch xmlns:a="http://schemas.openxmlformats.org/drawingml/2006/main"/>
         </p:blipFill>
         <p:spPr>
@@ -1451,7 +1451,7 @@
           <p:nvPr/>
         </p:nvPicPr>
         <p:blipFill rotWithShape="1">
-          <a:blip xmlns:r="http://schemas.openxmlformats.org/officeDocument/2006/relationships" xmlns:a="http://schemas.openxmlformats.org/drawingml/2006/main" r:embed="Ra290eb3cc90c4af2">
+          <a:blip xmlns:r="http://schemas.openxmlformats.org/officeDocument/2006/relationships" xmlns:a="http://schemas.openxmlformats.org/drawingml/2006/main" r:embed="R263312342eef4827">
             <a:alphaModFix amt="28000"/>
           </a:blip>
           <a:stretch xmlns:a="http://schemas.openxmlformats.org/drawingml/2006/main"/>
@@ -1664,7 +1664,7 @@
           <p:nvPr/>
         </p:nvPicPr>
         <p:blipFill rotWithShape="1">
-          <a:blip xmlns:r="http://schemas.openxmlformats.org/officeDocument/2006/relationships" xmlns:a="http://schemas.openxmlformats.org/drawingml/2006/main" r:embed="Rd7ea8055b20e4467">
+          <a:blip xmlns:r="http://schemas.openxmlformats.org/officeDocument/2006/relationships" xmlns:a="http://schemas.openxmlformats.org/drawingml/2006/main" r:embed="R7973f6425f544211">
             <a:alphaModFix amt="28000"/>
           </a:blip>
           <a:stretch xmlns:a="http://schemas.openxmlformats.org/drawingml/2006/main"/>
@@ -1899,7 +1899,7 @@
           <p:nvPr/>
         </p:nvPicPr>
         <p:blipFill rotWithShape="1">
-          <a:blip xmlns:r="http://schemas.openxmlformats.org/officeDocument/2006/relationships" xmlns:a="http://schemas.openxmlformats.org/drawingml/2006/main" r:embed="R6d3dd968e1ce41b4">
+          <a:blip xmlns:r="http://schemas.openxmlformats.org/officeDocument/2006/relationships" xmlns:a="http://schemas.openxmlformats.org/drawingml/2006/main" r:embed="R4f695b7800cb472e">
             <a:alphaModFix amt="28000"/>
           </a:blip>
           <a:stretch xmlns:a="http://schemas.openxmlformats.org/drawingml/2006/main"/>
@@ -2176,7 +2176,7 @@
           <p:nvPr/>
         </p:nvPicPr>
         <p:blipFill rotWithShape="1">
-          <a:blip xmlns:r="http://schemas.openxmlformats.org/officeDocument/2006/relationships" xmlns:a="http://schemas.openxmlformats.org/drawingml/2006/main" r:embed="R3efa27706efd4e15">
+          <a:blip xmlns:r="http://schemas.openxmlformats.org/officeDocument/2006/relationships" xmlns:a="http://schemas.openxmlformats.org/drawingml/2006/main" r:embed="Rc5069f05a0f1400c">
             <a:alphaModFix amt="28000"/>
           </a:blip>
           <a:stretch xmlns:a="http://schemas.openxmlformats.org/drawingml/2006/main"/>
@@ -2451,7 +2451,7 @@
           <p:nvPr/>
         </p:nvPicPr>
         <p:blipFill rotWithShape="1">
-          <a:blip xmlns:r="http://schemas.openxmlformats.org/officeDocument/2006/relationships" xmlns:a="http://schemas.openxmlformats.org/drawingml/2006/main" r:embed="R1a678d58f44b4bdb">
+          <a:blip xmlns:r="http://schemas.openxmlformats.org/officeDocument/2006/relationships" xmlns:a="http://schemas.openxmlformats.org/drawingml/2006/main" r:embed="R01b7c1bb9f864fa2">
             <a:alphaModFix amt="28000"/>
           </a:blip>
           <a:stretch xmlns:a="http://schemas.openxmlformats.org/drawingml/2006/main"/>
@@ -2875,7 +2875,7 @@
           <p:nvPr/>
         </p:nvPicPr>
         <p:blipFill rotWithShape="1">
-          <a:blip xmlns:r="http://schemas.openxmlformats.org/officeDocument/2006/relationships" xmlns:a="http://schemas.openxmlformats.org/drawingml/2006/main" r:embed="R385ac46b532b4cf2">
+          <a:blip xmlns:r="http://schemas.openxmlformats.org/officeDocument/2006/relationships" xmlns:a="http://schemas.openxmlformats.org/drawingml/2006/main" r:embed="Raa8914efcb6e4094">
             <a:alphaModFix amt="28000"/>
           </a:blip>
           <a:stretch xmlns:a="http://schemas.openxmlformats.org/drawingml/2006/main"/>
@@ -3016,7 +3016,7 @@
           <p:nvPr/>
         </p:nvPicPr>
         <p:blipFill rotWithShape="1">
-          <a:blip xmlns:r="http://schemas.openxmlformats.org/officeDocument/2006/relationships" xmlns:a="http://schemas.openxmlformats.org/drawingml/2006/main" r:embed="R0ee52106f9d34328">
+          <a:blip xmlns:r="http://schemas.openxmlformats.org/officeDocument/2006/relationships" xmlns:a="http://schemas.openxmlformats.org/drawingml/2006/main" r:embed="Ra71a142374d8438d">
             <a:alphaModFix amt="28000"/>
           </a:blip>
           <a:stretch xmlns:a="http://schemas.openxmlformats.org/drawingml/2006/main"/>
@@ -3130,7 +3130,7 @@
           <p:nvPr/>
         </p:nvPicPr>
         <p:blipFill rotWithShape="1">
-          <a:blip xmlns:r="http://schemas.openxmlformats.org/officeDocument/2006/relationships" xmlns:a="http://schemas.openxmlformats.org/drawingml/2006/main" r:embed="Raba885602b964dde">
+          <a:blip xmlns:r="http://schemas.openxmlformats.org/officeDocument/2006/relationships" xmlns:a="http://schemas.openxmlformats.org/drawingml/2006/main" r:embed="Re2d66aa115044c81">
             <a:alphaModFix amt="28000"/>
           </a:blip>
           <a:stretch xmlns:a="http://schemas.openxmlformats.org/drawingml/2006/main"/>
@@ -3457,7 +3457,7 @@
           <p:nvPr/>
         </p:nvPicPr>
         <p:blipFill rotWithShape="1">
-          <a:blip xmlns:r="http://schemas.openxmlformats.org/officeDocument/2006/relationships" xmlns:a="http://schemas.openxmlformats.org/drawingml/2006/main" r:embed="R129c6650a2ca47d7">
+          <a:blip xmlns:r="http://schemas.openxmlformats.org/officeDocument/2006/relationships" xmlns:a="http://schemas.openxmlformats.org/drawingml/2006/main" r:embed="R1aa675b732ab48fa">
             <a:alphaModFix amt="28000"/>
           </a:blip>
           <a:stretch xmlns:a="http://schemas.openxmlformats.org/drawingml/2006/main"/>
@@ -3745,7 +3745,7 @@
           <p:nvPr/>
         </p:nvPicPr>
         <p:blipFill rotWithShape="1">
-          <a:blip xmlns:r="http://schemas.openxmlformats.org/officeDocument/2006/relationships" xmlns:a="http://schemas.openxmlformats.org/drawingml/2006/main" r:embed="R4134243021494b0e">
+          <a:blip xmlns:r="http://schemas.openxmlformats.org/officeDocument/2006/relationships" xmlns:a="http://schemas.openxmlformats.org/drawingml/2006/main" r:embed="Raa6239960c814a2e">
             <a:alphaModFix amt="28000"/>
           </a:blip>
           <a:stretch xmlns:a="http://schemas.openxmlformats.org/drawingml/2006/main"/>
@@ -3982,17 +3982,17 @@
   </p:cSld>
   <p:clrMap bg1="lt1" tx1="dk1" bg2="lt2" tx2="dk2" accent1="accent1" accent2="accent2" accent3="accent3" accent4="accent4" accent5="accent5" accent6="accent6" hlink="hlink" folHlink="folHlink"/>
   <p:sldLayoutIdLst>
-    <p:sldLayoutId xmlns:r="http://schemas.openxmlformats.org/officeDocument/2006/relationships" id="2147483649" r:id="R445c4b952ee345b3"/>
-    <p:sldLayoutId xmlns:r="http://schemas.openxmlformats.org/officeDocument/2006/relationships" id="2147483650" r:id="R976aec75e4534d02"/>
-    <p:sldLayoutId xmlns:r="http://schemas.openxmlformats.org/officeDocument/2006/relationships" id="2147483651" r:id="Rbe286c813141452c"/>
-    <p:sldLayoutId xmlns:r="http://schemas.openxmlformats.org/officeDocument/2006/relationships" id="2147483652" r:id="Rfdea138a9edc4224"/>
-    <p:sldLayoutId xmlns:r="http://schemas.openxmlformats.org/officeDocument/2006/relationships" id="2147483653" r:id="R6534f5234a4a474b"/>
-    <p:sldLayoutId xmlns:r="http://schemas.openxmlformats.org/officeDocument/2006/relationships" id="2147483654" r:id="R24f73624eadb46f0"/>
-    <p:sldLayoutId xmlns:r="http://schemas.openxmlformats.org/officeDocument/2006/relationships" id="2147483655" r:id="Rdfe9723b62934968"/>
-    <p:sldLayoutId xmlns:r="http://schemas.openxmlformats.org/officeDocument/2006/relationships" id="2147483656" r:id="R1254612fb2e44485"/>
-    <p:sldLayoutId xmlns:r="http://schemas.openxmlformats.org/officeDocument/2006/relationships" id="2147483657" r:id="Rac24c3b272b44245"/>
-    <p:sldLayoutId xmlns:r="http://schemas.openxmlformats.org/officeDocument/2006/relationships" id="2147483658" r:id="R11160a551bb04d97"/>
-    <p:sldLayoutId xmlns:r="http://schemas.openxmlformats.org/officeDocument/2006/relationships" id="2147483659" r:id="R0f571497778740b0"/>
+    <p:sldLayoutId xmlns:r="http://schemas.openxmlformats.org/officeDocument/2006/relationships" id="2147483649" r:id="Re62f681134694e34"/>
+    <p:sldLayoutId xmlns:r="http://schemas.openxmlformats.org/officeDocument/2006/relationships" id="2147483650" r:id="Raa3bd7f7a3834652"/>
+    <p:sldLayoutId xmlns:r="http://schemas.openxmlformats.org/officeDocument/2006/relationships" id="2147483651" r:id="R2564c95ca1064635"/>
+    <p:sldLayoutId xmlns:r="http://schemas.openxmlformats.org/officeDocument/2006/relationships" id="2147483652" r:id="R35229a05e49b481b"/>
+    <p:sldLayoutId xmlns:r="http://schemas.openxmlformats.org/officeDocument/2006/relationships" id="2147483653" r:id="Rddd07262c22a4419"/>
+    <p:sldLayoutId xmlns:r="http://schemas.openxmlformats.org/officeDocument/2006/relationships" id="2147483654" r:id="Rdcdc901b6f074be7"/>
+    <p:sldLayoutId xmlns:r="http://schemas.openxmlformats.org/officeDocument/2006/relationships" id="2147483655" r:id="R0ed3a5b7f3d7462b"/>
+    <p:sldLayoutId xmlns:r="http://schemas.openxmlformats.org/officeDocument/2006/relationships" id="2147483656" r:id="Rb2e3d4404de34e2d"/>
+    <p:sldLayoutId xmlns:r="http://schemas.openxmlformats.org/officeDocument/2006/relationships" id="2147483657" r:id="Rc2125084884e4b65"/>
+    <p:sldLayoutId xmlns:r="http://schemas.openxmlformats.org/officeDocument/2006/relationships" id="2147483658" r:id="R393373a5ef6d4d70"/>
+    <p:sldLayoutId xmlns:r="http://schemas.openxmlformats.org/officeDocument/2006/relationships" id="2147483659" r:id="R4404ccc4e8ed4e5f"/>
   </p:sldLayoutIdLst>
   <p:hf hdr="0" ftr="0" dt="0"/>
   <p:txStyles>
